--- a/docs/pptx/auc3/ritu-auc3-linsubhr-egfrdisc-throm2.pptx
+++ b/docs/pptx/auc3/ritu-auc3-linsubhr-egfrdisc-throm2.pptx
@@ -2443,7 +2443,7 @@
           </p:nvSpPr>
           <p:spPr>
             <a:xfrm>
-              <a:off x="2040316" y="2073503"/>
+              <a:off x="2044638" y="2073503"/>
               <a:ext cx="0" cy="3649639"/>
             </a:xfrm>
             <a:custGeom>
@@ -2486,7 +2486,7 @@
           </p:nvSpPr>
           <p:spPr>
             <a:xfrm>
-              <a:off x="4520982" y="2073503"/>
+              <a:off x="4520586" y="2073503"/>
               <a:ext cx="0" cy="3649639"/>
             </a:xfrm>
             <a:custGeom>
@@ -2529,7 +2529,7 @@
           </p:nvSpPr>
           <p:spPr>
             <a:xfrm>
-              <a:off x="7001648" y="2073503"/>
+              <a:off x="6996534" y="2073503"/>
               <a:ext cx="0" cy="3649639"/>
             </a:xfrm>
             <a:custGeom>
@@ -2787,7 +2787,7 @@
           </p:nvSpPr>
           <p:spPr>
             <a:xfrm>
-              <a:off x="3280649" y="2073503"/>
+              <a:off x="3282612" y="2073503"/>
               <a:ext cx="0" cy="3649639"/>
             </a:xfrm>
             <a:custGeom>
@@ -2830,7 +2830,7 @@
           </p:nvSpPr>
           <p:spPr>
             <a:xfrm>
-              <a:off x="5761315" y="2073503"/>
+              <a:off x="5758560" y="2073503"/>
               <a:ext cx="0" cy="3649639"/>
             </a:xfrm>
             <a:custGeom>
@@ -2873,7 +2873,7 @@
           </p:nvSpPr>
           <p:spPr>
             <a:xfrm>
-              <a:off x="8241981" y="2073503"/>
+              <a:off x="8234508" y="2073503"/>
               <a:ext cx="0" cy="3649639"/>
             </a:xfrm>
             <a:custGeom>
@@ -2917,569 +2917,569 @@
           <p:spPr>
             <a:xfrm>
               <a:off x="1172049" y="2073503"/>
-              <a:ext cx="7090630" cy="3474485"/>
+              <a:ext cx="7090630" cy="3474590"/>
             </a:xfrm>
             <a:custGeom>
               <a:avLst/>
               <a:pathLst>
-                <a:path w="7090630" h="3474485">
+                <a:path w="7090630" h="3474590">
                   <a:moveTo>
-                    <a:pt x="88838" y="0"/>
+                    <a:pt x="100255" y="0"/>
                   </a:moveTo>
                   <a:lnTo>
-                    <a:pt x="143245" y="60143"/>
-                  </a:lnTo>
-                  <a:lnTo>
-                    <a:pt x="214867" y="137528"/>
-                  </a:lnTo>
-                  <a:lnTo>
-                    <a:pt x="286490" y="213164"/>
-                  </a:lnTo>
-                  <a:lnTo>
-                    <a:pt x="358112" y="287091"/>
-                  </a:lnTo>
-                  <a:lnTo>
-                    <a:pt x="429735" y="359346"/>
-                  </a:lnTo>
-                  <a:lnTo>
-                    <a:pt x="501357" y="429968"/>
-                  </a:lnTo>
-                  <a:lnTo>
-                    <a:pt x="572980" y="498994"/>
-                  </a:lnTo>
-                  <a:lnTo>
-                    <a:pt x="644602" y="566459"/>
-                  </a:lnTo>
-                  <a:lnTo>
-                    <a:pt x="716225" y="632400"/>
-                  </a:lnTo>
-                  <a:lnTo>
-                    <a:pt x="787847" y="696850"/>
-                  </a:lnTo>
-                  <a:lnTo>
-                    <a:pt x="859470" y="759843"/>
-                  </a:lnTo>
-                  <a:lnTo>
-                    <a:pt x="931092" y="821413"/>
-                  </a:lnTo>
-                  <a:lnTo>
-                    <a:pt x="1002715" y="881591"/>
-                  </a:lnTo>
-                  <a:lnTo>
-                    <a:pt x="1074337" y="940408"/>
-                  </a:lnTo>
-                  <a:lnTo>
-                    <a:pt x="1145960" y="997896"/>
-                  </a:lnTo>
-                  <a:lnTo>
-                    <a:pt x="1217582" y="1054085"/>
-                  </a:lnTo>
-                  <a:lnTo>
-                    <a:pt x="1289205" y="1109003"/>
-                  </a:lnTo>
-                  <a:lnTo>
-                    <a:pt x="1360827" y="1162681"/>
-                  </a:lnTo>
-                  <a:lnTo>
-                    <a:pt x="1432450" y="1215145"/>
-                  </a:lnTo>
-                  <a:lnTo>
-                    <a:pt x="1504073" y="1266423"/>
-                  </a:lnTo>
-                  <a:lnTo>
-                    <a:pt x="1575695" y="1316542"/>
-                  </a:lnTo>
-                  <a:lnTo>
-                    <a:pt x="1647318" y="1365528"/>
-                  </a:lnTo>
-                  <a:lnTo>
-                    <a:pt x="1718940" y="1413407"/>
-                  </a:lnTo>
-                  <a:lnTo>
-                    <a:pt x="1790563" y="1460204"/>
-                  </a:lnTo>
-                  <a:lnTo>
-                    <a:pt x="1862185" y="1505943"/>
-                  </a:lnTo>
-                  <a:lnTo>
-                    <a:pt x="1933808" y="1550648"/>
-                  </a:lnTo>
-                  <a:lnTo>
-                    <a:pt x="2005430" y="1594342"/>
-                  </a:lnTo>
-                  <a:lnTo>
-                    <a:pt x="2077053" y="1637049"/>
-                  </a:lnTo>
-                  <a:lnTo>
-                    <a:pt x="2148675" y="1678791"/>
-                  </a:lnTo>
-                  <a:lnTo>
-                    <a:pt x="2220298" y="1719589"/>
-                  </a:lnTo>
-                  <a:lnTo>
-                    <a:pt x="2291920" y="1759465"/>
-                  </a:lnTo>
-                  <a:lnTo>
-                    <a:pt x="2363543" y="1798439"/>
-                  </a:lnTo>
-                  <a:lnTo>
-                    <a:pt x="2435165" y="1836533"/>
-                  </a:lnTo>
-                  <a:lnTo>
-                    <a:pt x="2506788" y="1873766"/>
-                  </a:lnTo>
-                  <a:lnTo>
-                    <a:pt x="2578410" y="1910157"/>
-                  </a:lnTo>
-                  <a:lnTo>
-                    <a:pt x="2650033" y="1945725"/>
-                  </a:lnTo>
-                  <a:lnTo>
-                    <a:pt x="2721655" y="1980490"/>
-                  </a:lnTo>
-                  <a:lnTo>
-                    <a:pt x="2793278" y="2014468"/>
-                  </a:lnTo>
-                  <a:lnTo>
-                    <a:pt x="2864901" y="2047679"/>
-                  </a:lnTo>
-                  <a:lnTo>
-                    <a:pt x="2936523" y="2080139"/>
-                  </a:lnTo>
-                  <a:lnTo>
-                    <a:pt x="3008146" y="2111865"/>
-                  </a:lnTo>
-                  <a:lnTo>
-                    <a:pt x="3079768" y="2142875"/>
-                  </a:lnTo>
-                  <a:lnTo>
-                    <a:pt x="3151391" y="2173183"/>
-                  </a:lnTo>
-                  <a:lnTo>
-                    <a:pt x="3223013" y="2202806"/>
-                  </a:lnTo>
-                  <a:lnTo>
-                    <a:pt x="3294636" y="2231760"/>
-                  </a:lnTo>
-                  <a:lnTo>
-                    <a:pt x="3366258" y="2260059"/>
-                  </a:lnTo>
-                  <a:lnTo>
-                    <a:pt x="3437881" y="2287718"/>
-                  </a:lnTo>
-                  <a:lnTo>
-                    <a:pt x="3509503" y="2314753"/>
-                  </a:lnTo>
-                  <a:lnTo>
-                    <a:pt x="3581126" y="2341176"/>
-                  </a:lnTo>
-                  <a:lnTo>
-                    <a:pt x="3652748" y="2367002"/>
-                  </a:lnTo>
-                  <a:lnTo>
-                    <a:pt x="3724371" y="2392244"/>
-                  </a:lnTo>
-                  <a:lnTo>
-                    <a:pt x="3795993" y="2416916"/>
-                  </a:lnTo>
-                  <a:lnTo>
-                    <a:pt x="3867616" y="2441030"/>
-                  </a:lnTo>
-                  <a:lnTo>
-                    <a:pt x="3939238" y="2464599"/>
-                  </a:lnTo>
-                  <a:lnTo>
-                    <a:pt x="4010861" y="2487635"/>
-                  </a:lnTo>
-                  <a:lnTo>
-                    <a:pt x="4082483" y="2510150"/>
-                  </a:lnTo>
-                  <a:lnTo>
-                    <a:pt x="4154106" y="2532157"/>
-                  </a:lnTo>
-                  <a:lnTo>
-                    <a:pt x="4225729" y="2553666"/>
-                  </a:lnTo>
-                  <a:lnTo>
-                    <a:pt x="4297351" y="2574689"/>
-                  </a:lnTo>
-                  <a:lnTo>
-                    <a:pt x="4368974" y="2595237"/>
-                  </a:lnTo>
-                  <a:lnTo>
-                    <a:pt x="4440596" y="2615320"/>
-                  </a:lnTo>
-                  <a:lnTo>
-                    <a:pt x="4512219" y="2634950"/>
-                  </a:lnTo>
-                  <a:lnTo>
-                    <a:pt x="4583841" y="2654135"/>
-                  </a:lnTo>
-                  <a:lnTo>
-                    <a:pt x="4655464" y="2594426"/>
-                  </a:lnTo>
-                  <a:lnTo>
-                    <a:pt x="4727086" y="2529728"/>
-                  </a:lnTo>
-                  <a:lnTo>
-                    <a:pt x="4798709" y="2460323"/>
-                  </a:lnTo>
-                  <a:lnTo>
-                    <a:pt x="4870331" y="2385869"/>
-                  </a:lnTo>
-                  <a:lnTo>
-                    <a:pt x="4941954" y="2305999"/>
-                  </a:lnTo>
-                  <a:lnTo>
-                    <a:pt x="5013576" y="2220318"/>
-                  </a:lnTo>
-                  <a:lnTo>
-                    <a:pt x="5085199" y="2128403"/>
-                  </a:lnTo>
-                  <a:lnTo>
-                    <a:pt x="5156821" y="2029802"/>
-                  </a:lnTo>
-                  <a:lnTo>
-                    <a:pt x="5228444" y="1924028"/>
-                  </a:lnTo>
-                  <a:lnTo>
-                    <a:pt x="5300066" y="1810559"/>
-                  </a:lnTo>
-                  <a:lnTo>
-                    <a:pt x="5371689" y="1688834"/>
-                  </a:lnTo>
-                  <a:lnTo>
-                    <a:pt x="5443311" y="1558255"/>
-                  </a:lnTo>
-                  <a:lnTo>
-                    <a:pt x="5514934" y="1418175"/>
-                  </a:lnTo>
-                  <a:lnTo>
-                    <a:pt x="5586557" y="1267905"/>
-                  </a:lnTo>
-                  <a:lnTo>
-                    <a:pt x="5658179" y="1106703"/>
-                  </a:lnTo>
-                  <a:lnTo>
-                    <a:pt x="5729802" y="933773"/>
-                  </a:lnTo>
-                  <a:lnTo>
-                    <a:pt x="5801424" y="748263"/>
-                  </a:lnTo>
-                  <a:lnTo>
-                    <a:pt x="5873047" y="549257"/>
-                  </a:lnTo>
-                  <a:lnTo>
-                    <a:pt x="5944669" y="335773"/>
-                  </a:lnTo>
-                  <a:lnTo>
-                    <a:pt x="6016292" y="106758"/>
-                  </a:lnTo>
-                  <a:lnTo>
-                    <a:pt x="6047415" y="0"/>
+                    <a:pt x="143245" y="47786"/>
+                  </a:lnTo>
+                  <a:lnTo>
+                    <a:pt x="214867" y="125596"/>
+                  </a:lnTo>
+                  <a:lnTo>
+                    <a:pt x="286490" y="201645"/>
+                  </a:lnTo>
+                  <a:lnTo>
+                    <a:pt x="358112" y="275971"/>
+                  </a:lnTo>
+                  <a:lnTo>
+                    <a:pt x="429735" y="348614"/>
+                  </a:lnTo>
+                  <a:lnTo>
+                    <a:pt x="501357" y="419613"/>
+                  </a:lnTo>
+                  <a:lnTo>
+                    <a:pt x="572980" y="489003"/>
+                  </a:lnTo>
+                  <a:lnTo>
+                    <a:pt x="644602" y="556822"/>
+                  </a:lnTo>
+                  <a:lnTo>
+                    <a:pt x="716225" y="623105"/>
+                  </a:lnTo>
+                  <a:lnTo>
+                    <a:pt x="787847" y="687887"/>
+                  </a:lnTo>
+                  <a:lnTo>
+                    <a:pt x="859470" y="751202"/>
+                  </a:lnTo>
+                  <a:lnTo>
+                    <a:pt x="931092" y="813083"/>
+                  </a:lnTo>
+                  <a:lnTo>
+                    <a:pt x="1002715" y="873562"/>
+                  </a:lnTo>
+                  <a:lnTo>
+                    <a:pt x="1074337" y="932672"/>
+                  </a:lnTo>
+                  <a:lnTo>
+                    <a:pt x="1145960" y="990444"/>
+                  </a:lnTo>
+                  <a:lnTo>
+                    <a:pt x="1217582" y="1046907"/>
+                  </a:lnTo>
+                  <a:lnTo>
+                    <a:pt x="1289205" y="1102092"/>
+                  </a:lnTo>
+                  <a:lnTo>
+                    <a:pt x="1360827" y="1156027"/>
+                  </a:lnTo>
+                  <a:lnTo>
+                    <a:pt x="1432450" y="1208740"/>
+                  </a:lnTo>
+                  <a:lnTo>
+                    <a:pt x="1504073" y="1260260"/>
+                  </a:lnTo>
+                  <a:lnTo>
+                    <a:pt x="1575695" y="1310613"/>
+                  </a:lnTo>
+                  <a:lnTo>
+                    <a:pt x="1647318" y="1359825"/>
+                  </a:lnTo>
+                  <a:lnTo>
+                    <a:pt x="1718940" y="1407924"/>
+                  </a:lnTo>
+                  <a:lnTo>
+                    <a:pt x="1790563" y="1454933"/>
+                  </a:lnTo>
+                  <a:lnTo>
+                    <a:pt x="1862185" y="1500877"/>
+                  </a:lnTo>
+                  <a:lnTo>
+                    <a:pt x="1933808" y="1545781"/>
+                  </a:lnTo>
+                  <a:lnTo>
+                    <a:pt x="2005430" y="1589668"/>
+                  </a:lnTo>
+                  <a:lnTo>
+                    <a:pt x="2077053" y="1632561"/>
+                  </a:lnTo>
+                  <a:lnTo>
+                    <a:pt x="2148675" y="1674483"/>
+                  </a:lnTo>
+                  <a:lnTo>
+                    <a:pt x="2220298" y="1715456"/>
+                  </a:lnTo>
+                  <a:lnTo>
+                    <a:pt x="2291920" y="1755500"/>
+                  </a:lnTo>
+                  <a:lnTo>
+                    <a:pt x="2363543" y="1794638"/>
+                  </a:lnTo>
+                  <a:lnTo>
+                    <a:pt x="2435165" y="1832890"/>
+                  </a:lnTo>
+                  <a:lnTo>
+                    <a:pt x="2506788" y="1870275"/>
+                  </a:lnTo>
+                  <a:lnTo>
+                    <a:pt x="2578410" y="1906813"/>
+                  </a:lnTo>
+                  <a:lnTo>
+                    <a:pt x="2650033" y="1942525"/>
+                  </a:lnTo>
+                  <a:lnTo>
+                    <a:pt x="2721655" y="1977427"/>
+                  </a:lnTo>
+                  <a:lnTo>
+                    <a:pt x="2793278" y="2011539"/>
+                  </a:lnTo>
+                  <a:lnTo>
+                    <a:pt x="2864901" y="2044879"/>
+                  </a:lnTo>
+                  <a:lnTo>
+                    <a:pt x="2936523" y="2077463"/>
+                  </a:lnTo>
+                  <a:lnTo>
+                    <a:pt x="3008146" y="2109310"/>
+                  </a:lnTo>
+                  <a:lnTo>
+                    <a:pt x="3079768" y="2140435"/>
+                  </a:lnTo>
+                  <a:lnTo>
+                    <a:pt x="3151391" y="2170856"/>
+                  </a:lnTo>
+                  <a:lnTo>
+                    <a:pt x="3223013" y="2200587"/>
+                  </a:lnTo>
+                  <a:lnTo>
+                    <a:pt x="3294636" y="2229646"/>
+                  </a:lnTo>
+                  <a:lnTo>
+                    <a:pt x="3366258" y="2258046"/>
+                  </a:lnTo>
+                  <a:lnTo>
+                    <a:pt x="3437881" y="2285803"/>
+                  </a:lnTo>
+                  <a:lnTo>
+                    <a:pt x="3509503" y="2312932"/>
+                  </a:lnTo>
+                  <a:lnTo>
+                    <a:pt x="3581126" y="2339446"/>
+                  </a:lnTo>
+                  <a:lnTo>
+                    <a:pt x="3652748" y="2365360"/>
+                  </a:lnTo>
+                  <a:lnTo>
+                    <a:pt x="3724371" y="2390687"/>
+                  </a:lnTo>
+                  <a:lnTo>
+                    <a:pt x="3795993" y="2415440"/>
+                  </a:lnTo>
+                  <a:lnTo>
+                    <a:pt x="3867616" y="2439633"/>
+                  </a:lnTo>
+                  <a:lnTo>
+                    <a:pt x="3939238" y="2463278"/>
+                  </a:lnTo>
+                  <a:lnTo>
+                    <a:pt x="4010861" y="2486387"/>
+                  </a:lnTo>
+                  <a:lnTo>
+                    <a:pt x="4082483" y="2508974"/>
+                  </a:lnTo>
+                  <a:lnTo>
+                    <a:pt x="4154106" y="2531048"/>
+                  </a:lnTo>
+                  <a:lnTo>
+                    <a:pt x="4225729" y="2552623"/>
+                  </a:lnTo>
+                  <a:lnTo>
+                    <a:pt x="4297351" y="2573709"/>
+                  </a:lnTo>
+                  <a:lnTo>
+                    <a:pt x="4368974" y="2594318"/>
+                  </a:lnTo>
+                  <a:lnTo>
+                    <a:pt x="4440596" y="2614460"/>
+                  </a:lnTo>
+                  <a:lnTo>
+                    <a:pt x="4512219" y="2634146"/>
+                  </a:lnTo>
+                  <a:lnTo>
+                    <a:pt x="4583841" y="2653386"/>
+                  </a:lnTo>
+                  <a:lnTo>
+                    <a:pt x="4655464" y="2596771"/>
+                  </a:lnTo>
+                  <a:lnTo>
+                    <a:pt x="4727086" y="2532116"/>
+                  </a:lnTo>
+                  <a:lnTo>
+                    <a:pt x="4798709" y="2462748"/>
+                  </a:lnTo>
+                  <a:lnTo>
+                    <a:pt x="4870331" y="2388324"/>
+                  </a:lnTo>
+                  <a:lnTo>
+                    <a:pt x="4941954" y="2308475"/>
+                  </a:lnTo>
+                  <a:lnTo>
+                    <a:pt x="5013576" y="2222805"/>
+                  </a:lnTo>
+                  <a:lnTo>
+                    <a:pt x="5085199" y="2130891"/>
+                  </a:lnTo>
+                  <a:lnTo>
+                    <a:pt x="5156821" y="2032277"/>
+                  </a:lnTo>
+                  <a:lnTo>
+                    <a:pt x="5228444" y="1926474"/>
+                  </a:lnTo>
+                  <a:lnTo>
+                    <a:pt x="5300066" y="1812959"/>
+                  </a:lnTo>
+                  <a:lnTo>
+                    <a:pt x="5371689" y="1691170"/>
+                  </a:lnTo>
+                  <a:lnTo>
+                    <a:pt x="5443311" y="1560503"/>
+                  </a:lnTo>
+                  <a:lnTo>
+                    <a:pt x="5514934" y="1420311"/>
+                  </a:lnTo>
+                  <a:lnTo>
+                    <a:pt x="5586557" y="1269900"/>
+                  </a:lnTo>
+                  <a:lnTo>
+                    <a:pt x="5658179" y="1108525"/>
+                  </a:lnTo>
+                  <a:lnTo>
+                    <a:pt x="5729802" y="935387"/>
+                  </a:lnTo>
+                  <a:lnTo>
+                    <a:pt x="5801424" y="749628"/>
+                  </a:lnTo>
+                  <a:lnTo>
+                    <a:pt x="5873047" y="550329"/>
+                  </a:lnTo>
+                  <a:lnTo>
+                    <a:pt x="5944669" y="336502"/>
+                  </a:lnTo>
+                  <a:lnTo>
+                    <a:pt x="6016292" y="107088"/>
+                  </a:lnTo>
+                  <a:lnTo>
+                    <a:pt x="6047453" y="0"/>
                   </a:lnTo>
                   <a:lnTo>
                     <a:pt x="7090630" y="0"/>
                   </a:lnTo>
                   <a:lnTo>
-                    <a:pt x="7090630" y="3111051"/>
-                  </a:lnTo>
-                  <a:lnTo>
-                    <a:pt x="7019007" y="3102432"/>
-                  </a:lnTo>
-                  <a:lnTo>
-                    <a:pt x="6947385" y="3093614"/>
-                  </a:lnTo>
-                  <a:lnTo>
-                    <a:pt x="6875762" y="3084592"/>
-                  </a:lnTo>
-                  <a:lnTo>
-                    <a:pt x="6804139" y="3075361"/>
-                  </a:lnTo>
-                  <a:lnTo>
-                    <a:pt x="6732517" y="3065917"/>
-                  </a:lnTo>
-                  <a:lnTo>
-                    <a:pt x="6660894" y="3056254"/>
-                  </a:lnTo>
-                  <a:lnTo>
-                    <a:pt x="6589272" y="3046368"/>
-                  </a:lnTo>
-                  <a:lnTo>
-                    <a:pt x="6517649" y="3036253"/>
-                  </a:lnTo>
-                  <a:lnTo>
-                    <a:pt x="6446027" y="3025904"/>
-                  </a:lnTo>
-                  <a:lnTo>
-                    <a:pt x="6374404" y="3015316"/>
-                  </a:lnTo>
-                  <a:lnTo>
-                    <a:pt x="6302782" y="3004483"/>
-                  </a:lnTo>
-                  <a:lnTo>
-                    <a:pt x="6231159" y="2993399"/>
-                  </a:lnTo>
-                  <a:lnTo>
-                    <a:pt x="6159537" y="2982059"/>
-                  </a:lnTo>
-                  <a:lnTo>
-                    <a:pt x="6087914" y="2970457"/>
-                  </a:lnTo>
-                  <a:lnTo>
-                    <a:pt x="6016292" y="2958587"/>
-                  </a:lnTo>
-                  <a:lnTo>
-                    <a:pt x="5944669" y="2946442"/>
-                  </a:lnTo>
-                  <a:lnTo>
-                    <a:pt x="5873047" y="2934016"/>
-                  </a:lnTo>
-                  <a:lnTo>
-                    <a:pt x="5801424" y="2921303"/>
-                  </a:lnTo>
-                  <a:lnTo>
-                    <a:pt x="5729802" y="2908296"/>
-                  </a:lnTo>
-                  <a:lnTo>
-                    <a:pt x="5658179" y="2894988"/>
-                  </a:lnTo>
-                  <a:lnTo>
-                    <a:pt x="5586557" y="2881372"/>
-                  </a:lnTo>
-                  <a:lnTo>
-                    <a:pt x="5514934" y="2867442"/>
-                  </a:lnTo>
-                  <a:lnTo>
-                    <a:pt x="5443311" y="2853189"/>
-                  </a:lnTo>
-                  <a:lnTo>
-                    <a:pt x="5371689" y="2838607"/>
-                  </a:lnTo>
-                  <a:lnTo>
-                    <a:pt x="5300066" y="2823687"/>
-                  </a:lnTo>
-                  <a:lnTo>
-                    <a:pt x="5228444" y="2808423"/>
-                  </a:lnTo>
-                  <a:lnTo>
-                    <a:pt x="5156821" y="2792805"/>
-                  </a:lnTo>
-                  <a:lnTo>
-                    <a:pt x="5085199" y="2776826"/>
-                  </a:lnTo>
-                  <a:lnTo>
-                    <a:pt x="5013576" y="2760478"/>
-                  </a:lnTo>
-                  <a:lnTo>
-                    <a:pt x="4941954" y="2743751"/>
-                  </a:lnTo>
-                  <a:lnTo>
-                    <a:pt x="4870331" y="2726638"/>
-                  </a:lnTo>
-                  <a:lnTo>
-                    <a:pt x="4798709" y="2709129"/>
-                  </a:lnTo>
-                  <a:lnTo>
-                    <a:pt x="4727086" y="2691215"/>
-                  </a:lnTo>
-                  <a:lnTo>
-                    <a:pt x="4655464" y="2672887"/>
-                  </a:lnTo>
-                  <a:lnTo>
-                    <a:pt x="4583841" y="2654736"/>
-                  </a:lnTo>
-                  <a:lnTo>
-                    <a:pt x="4512219" y="2710957"/>
-                  </a:lnTo>
-                  <a:lnTo>
-                    <a:pt x="4440596" y="2763364"/>
-                  </a:lnTo>
-                  <a:lnTo>
-                    <a:pt x="4368974" y="2812218"/>
-                  </a:lnTo>
-                  <a:lnTo>
-                    <a:pt x="4297351" y="2857759"/>
-                  </a:lnTo>
-                  <a:lnTo>
-                    <a:pt x="4225729" y="2900211"/>
-                  </a:lnTo>
-                  <a:lnTo>
-                    <a:pt x="4154106" y="2939784"/>
-                  </a:lnTo>
-                  <a:lnTo>
-                    <a:pt x="4082483" y="2976673"/>
-                  </a:lnTo>
-                  <a:lnTo>
-                    <a:pt x="4010861" y="3011061"/>
-                  </a:lnTo>
-                  <a:lnTo>
-                    <a:pt x="3939238" y="3043117"/>
-                  </a:lnTo>
-                  <a:lnTo>
-                    <a:pt x="3867616" y="3072999"/>
-                  </a:lnTo>
-                  <a:lnTo>
-                    <a:pt x="3795993" y="3100854"/>
-                  </a:lnTo>
-                  <a:lnTo>
-                    <a:pt x="3724371" y="3126821"/>
-                  </a:lnTo>
-                  <a:lnTo>
-                    <a:pt x="3652748" y="3151026"/>
-                  </a:lnTo>
-                  <a:lnTo>
-                    <a:pt x="3581126" y="3173590"/>
-                  </a:lnTo>
-                  <a:lnTo>
-                    <a:pt x="3509503" y="3194623"/>
-                  </a:lnTo>
-                  <a:lnTo>
-                    <a:pt x="3437881" y="3214231"/>
-                  </a:lnTo>
-                  <a:lnTo>
-                    <a:pt x="3366258" y="3232508"/>
-                  </a:lnTo>
-                  <a:lnTo>
-                    <a:pt x="3294636" y="3249546"/>
-                  </a:lnTo>
-                  <a:lnTo>
-                    <a:pt x="3223013" y="3265429"/>
-                  </a:lnTo>
-                  <a:lnTo>
-                    <a:pt x="3151391" y="3280234"/>
-                  </a:lnTo>
-                  <a:lnTo>
-                    <a:pt x="3079768" y="3294036"/>
-                  </a:lnTo>
-                  <a:lnTo>
-                    <a:pt x="3008146" y="3306901"/>
-                  </a:lnTo>
-                  <a:lnTo>
-                    <a:pt x="2936523" y="3318894"/>
-                  </a:lnTo>
-                  <a:lnTo>
-                    <a:pt x="2864901" y="3330074"/>
-                  </a:lnTo>
-                  <a:lnTo>
-                    <a:pt x="2793278" y="3340495"/>
-                  </a:lnTo>
-                  <a:lnTo>
-                    <a:pt x="2721655" y="3350210"/>
-                  </a:lnTo>
-                  <a:lnTo>
-                    <a:pt x="2650033" y="3359266"/>
-                  </a:lnTo>
-                  <a:lnTo>
-                    <a:pt x="2578410" y="3367708"/>
-                  </a:lnTo>
-                  <a:lnTo>
-                    <a:pt x="2506788" y="3375577"/>
-                  </a:lnTo>
-                  <a:lnTo>
-                    <a:pt x="2435165" y="3382913"/>
-                  </a:lnTo>
-                  <a:lnTo>
-                    <a:pt x="2363543" y="3389751"/>
-                  </a:lnTo>
-                  <a:lnTo>
-                    <a:pt x="2291920" y="3396125"/>
-                  </a:lnTo>
-                  <a:lnTo>
-                    <a:pt x="2220298" y="3402068"/>
-                  </a:lnTo>
-                  <a:lnTo>
-                    <a:pt x="2148675" y="3407607"/>
-                  </a:lnTo>
-                  <a:lnTo>
-                    <a:pt x="2077053" y="3412770"/>
-                  </a:lnTo>
-                  <a:lnTo>
-                    <a:pt x="2005430" y="3417584"/>
-                  </a:lnTo>
-                  <a:lnTo>
-                    <a:pt x="1933808" y="3422070"/>
-                  </a:lnTo>
-                  <a:lnTo>
-                    <a:pt x="1862185" y="3426253"/>
-                  </a:lnTo>
-                  <a:lnTo>
-                    <a:pt x="1790563" y="3430152"/>
-                  </a:lnTo>
-                  <a:lnTo>
-                    <a:pt x="1718940" y="3433787"/>
-                  </a:lnTo>
-                  <a:lnTo>
-                    <a:pt x="1647318" y="3437175"/>
-                  </a:lnTo>
-                  <a:lnTo>
-                    <a:pt x="1575695" y="3440333"/>
-                  </a:lnTo>
-                  <a:lnTo>
-                    <a:pt x="1504073" y="3443277"/>
-                  </a:lnTo>
-                  <a:lnTo>
-                    <a:pt x="1432450" y="3446022"/>
-                  </a:lnTo>
-                  <a:lnTo>
-                    <a:pt x="1360827" y="3448580"/>
-                  </a:lnTo>
-                  <a:lnTo>
-                    <a:pt x="1289205" y="3450965"/>
-                  </a:lnTo>
-                  <a:lnTo>
-                    <a:pt x="1217582" y="3453188"/>
-                  </a:lnTo>
-                  <a:lnTo>
-                    <a:pt x="1145960" y="3455260"/>
-                  </a:lnTo>
-                  <a:lnTo>
-                    <a:pt x="1074337" y="3457192"/>
-                  </a:lnTo>
-                  <a:lnTo>
-                    <a:pt x="1002715" y="3458993"/>
-                  </a:lnTo>
-                  <a:lnTo>
-                    <a:pt x="931092" y="3460672"/>
-                  </a:lnTo>
-                  <a:lnTo>
-                    <a:pt x="859470" y="3462236"/>
-                  </a:lnTo>
-                  <a:lnTo>
-                    <a:pt x="787847" y="3463695"/>
-                  </a:lnTo>
-                  <a:lnTo>
-                    <a:pt x="716225" y="3465055"/>
-                  </a:lnTo>
-                  <a:lnTo>
-                    <a:pt x="644602" y="3466323"/>
-                  </a:lnTo>
-                  <a:lnTo>
-                    <a:pt x="572980" y="3467504"/>
-                  </a:lnTo>
-                  <a:lnTo>
-                    <a:pt x="501357" y="3468606"/>
-                  </a:lnTo>
-                  <a:lnTo>
-                    <a:pt x="429735" y="3469632"/>
-                  </a:lnTo>
-                  <a:lnTo>
-                    <a:pt x="358112" y="3470590"/>
-                  </a:lnTo>
-                  <a:lnTo>
-                    <a:pt x="286490" y="3471482"/>
-                  </a:lnTo>
-                  <a:lnTo>
-                    <a:pt x="214867" y="3472314"/>
-                  </a:lnTo>
-                  <a:lnTo>
-                    <a:pt x="143245" y="3473089"/>
-                  </a:lnTo>
-                  <a:lnTo>
-                    <a:pt x="71622" y="3473812"/>
-                  </a:lnTo>
-                  <a:lnTo>
-                    <a:pt x="0" y="3474485"/>
+                    <a:pt x="7090630" y="3111283"/>
+                  </a:lnTo>
+                  <a:lnTo>
+                    <a:pt x="7019007" y="3102653"/>
+                  </a:lnTo>
+                  <a:lnTo>
+                    <a:pt x="6947385" y="3093822"/>
+                  </a:lnTo>
+                  <a:lnTo>
+                    <a:pt x="6875762" y="3084788"/>
+                  </a:lnTo>
+                  <a:lnTo>
+                    <a:pt x="6804139" y="3075543"/>
+                  </a:lnTo>
+                  <a:lnTo>
+                    <a:pt x="6732517" y="3066085"/>
+                  </a:lnTo>
+                  <a:lnTo>
+                    <a:pt x="6660894" y="3056408"/>
+                  </a:lnTo>
+                  <a:lnTo>
+                    <a:pt x="6589272" y="3046506"/>
+                  </a:lnTo>
+                  <a:lnTo>
+                    <a:pt x="6517649" y="3036375"/>
+                  </a:lnTo>
+                  <a:lnTo>
+                    <a:pt x="6446027" y="3026009"/>
+                  </a:lnTo>
+                  <a:lnTo>
+                    <a:pt x="6374404" y="3015403"/>
+                  </a:lnTo>
+                  <a:lnTo>
+                    <a:pt x="6302782" y="3004551"/>
+                  </a:lnTo>
+                  <a:lnTo>
+                    <a:pt x="6231159" y="2993448"/>
+                  </a:lnTo>
+                  <a:lnTo>
+                    <a:pt x="6159537" y="2982087"/>
+                  </a:lnTo>
+                  <a:lnTo>
+                    <a:pt x="6087914" y="2970463"/>
+                  </a:lnTo>
+                  <a:lnTo>
+                    <a:pt x="6016292" y="2958570"/>
+                  </a:lnTo>
+                  <a:lnTo>
+                    <a:pt x="5944669" y="2946401"/>
+                  </a:lnTo>
+                  <a:lnTo>
+                    <a:pt x="5873047" y="2933951"/>
+                  </a:lnTo>
+                  <a:lnTo>
+                    <a:pt x="5801424" y="2921212"/>
+                  </a:lnTo>
+                  <a:lnTo>
+                    <a:pt x="5729802" y="2908177"/>
+                  </a:lnTo>
+                  <a:lnTo>
+                    <a:pt x="5658179" y="2894841"/>
+                  </a:lnTo>
+                  <a:lnTo>
+                    <a:pt x="5586557" y="2881196"/>
+                  </a:lnTo>
+                  <a:lnTo>
+                    <a:pt x="5514934" y="2867234"/>
+                  </a:lnTo>
+                  <a:lnTo>
+                    <a:pt x="5443311" y="2852949"/>
+                  </a:lnTo>
+                  <a:lnTo>
+                    <a:pt x="5371689" y="2838333"/>
+                  </a:lnTo>
+                  <a:lnTo>
+                    <a:pt x="5300066" y="2823379"/>
+                  </a:lnTo>
+                  <a:lnTo>
+                    <a:pt x="5228444" y="2808077"/>
+                  </a:lnTo>
+                  <a:lnTo>
+                    <a:pt x="5156821" y="2792422"/>
+                  </a:lnTo>
+                  <a:lnTo>
+                    <a:pt x="5085199" y="2776403"/>
+                  </a:lnTo>
+                  <a:lnTo>
+                    <a:pt x="5013576" y="2760014"/>
+                  </a:lnTo>
+                  <a:lnTo>
+                    <a:pt x="4941954" y="2743244"/>
+                  </a:lnTo>
+                  <a:lnTo>
+                    <a:pt x="4870331" y="2726086"/>
+                  </a:lnTo>
+                  <a:lnTo>
+                    <a:pt x="4798709" y="2708531"/>
+                  </a:lnTo>
+                  <a:lnTo>
+                    <a:pt x="4727086" y="2690568"/>
+                  </a:lnTo>
+                  <a:lnTo>
+                    <a:pt x="4655464" y="2672190"/>
+                  </a:lnTo>
+                  <a:lnTo>
+                    <a:pt x="4583841" y="2657033"/>
+                  </a:lnTo>
+                  <a:lnTo>
+                    <a:pt x="4512219" y="2713200"/>
+                  </a:lnTo>
+                  <a:lnTo>
+                    <a:pt x="4440596" y="2765552"/>
+                  </a:lnTo>
+                  <a:lnTo>
+                    <a:pt x="4368974" y="2814347"/>
+                  </a:lnTo>
+                  <a:lnTo>
+                    <a:pt x="4297351" y="2859827"/>
+                  </a:lnTo>
+                  <a:lnTo>
+                    <a:pt x="4225729" y="2902216"/>
+                  </a:lnTo>
+                  <a:lnTo>
+                    <a:pt x="4154106" y="2941726"/>
+                  </a:lnTo>
+                  <a:lnTo>
+                    <a:pt x="4082483" y="2978551"/>
+                  </a:lnTo>
+                  <a:lnTo>
+                    <a:pt x="4010861" y="3012875"/>
+                  </a:lnTo>
+                  <a:lnTo>
+                    <a:pt x="3939238" y="3044866"/>
+                  </a:lnTo>
+                  <a:lnTo>
+                    <a:pt x="3867616" y="3074684"/>
+                  </a:lnTo>
+                  <a:lnTo>
+                    <a:pt x="3795993" y="3102476"/>
+                  </a:lnTo>
+                  <a:lnTo>
+                    <a:pt x="3724371" y="3128380"/>
+                  </a:lnTo>
+                  <a:lnTo>
+                    <a:pt x="3652748" y="3152524"/>
+                  </a:lnTo>
+                  <a:lnTo>
+                    <a:pt x="3581126" y="3175028"/>
+                  </a:lnTo>
+                  <a:lnTo>
+                    <a:pt x="3509503" y="3196002"/>
+                  </a:lnTo>
+                  <a:lnTo>
+                    <a:pt x="3437881" y="3215552"/>
+                  </a:lnTo>
+                  <a:lnTo>
+                    <a:pt x="3366258" y="3233773"/>
+                  </a:lnTo>
+                  <a:lnTo>
+                    <a:pt x="3294636" y="3250757"/>
+                  </a:lnTo>
+                  <a:lnTo>
+                    <a:pt x="3223013" y="3266586"/>
+                  </a:lnTo>
+                  <a:lnTo>
+                    <a:pt x="3151391" y="3281340"/>
+                  </a:lnTo>
+                  <a:lnTo>
+                    <a:pt x="3079768" y="3295092"/>
+                  </a:lnTo>
+                  <a:lnTo>
+                    <a:pt x="3008146" y="3307909"/>
+                  </a:lnTo>
+                  <a:lnTo>
+                    <a:pt x="2936523" y="3319856"/>
+                  </a:lnTo>
+                  <a:lnTo>
+                    <a:pt x="2864901" y="3330991"/>
+                  </a:lnTo>
+                  <a:lnTo>
+                    <a:pt x="2793278" y="3341369"/>
+                  </a:lnTo>
+                  <a:lnTo>
+                    <a:pt x="2721655" y="3351042"/>
+                  </a:lnTo>
+                  <a:lnTo>
+                    <a:pt x="2650033" y="3360059"/>
+                  </a:lnTo>
+                  <a:lnTo>
+                    <a:pt x="2578410" y="3368462"/>
+                  </a:lnTo>
+                  <a:lnTo>
+                    <a:pt x="2506788" y="3376295"/>
+                  </a:lnTo>
+                  <a:lnTo>
+                    <a:pt x="2435165" y="3383595"/>
+                  </a:lnTo>
+                  <a:lnTo>
+                    <a:pt x="2363543" y="3390399"/>
+                  </a:lnTo>
+                  <a:lnTo>
+                    <a:pt x="2291920" y="3396741"/>
+                  </a:lnTo>
+                  <a:lnTo>
+                    <a:pt x="2220298" y="3402653"/>
+                  </a:lnTo>
+                  <a:lnTo>
+                    <a:pt x="2148675" y="3408162"/>
+                  </a:lnTo>
+                  <a:lnTo>
+                    <a:pt x="2077053" y="3413297"/>
+                  </a:lnTo>
+                  <a:lnTo>
+                    <a:pt x="2005430" y="3418084"/>
+                  </a:lnTo>
+                  <a:lnTo>
+                    <a:pt x="1933808" y="3422545"/>
+                  </a:lnTo>
+                  <a:lnTo>
+                    <a:pt x="1862185" y="3426703"/>
+                  </a:lnTo>
+                  <a:lnTo>
+                    <a:pt x="1790563" y="3430579"/>
+                  </a:lnTo>
+                  <a:lnTo>
+                    <a:pt x="1718940" y="3434191"/>
+                  </a:lnTo>
+                  <a:lnTo>
+                    <a:pt x="1647318" y="3437558"/>
+                  </a:lnTo>
+                  <a:lnTo>
+                    <a:pt x="1575695" y="3440696"/>
+                  </a:lnTo>
+                  <a:lnTo>
+                    <a:pt x="1504073" y="3443621"/>
+                  </a:lnTo>
+                  <a:lnTo>
+                    <a:pt x="1432450" y="3446347"/>
+                  </a:lnTo>
+                  <a:lnTo>
+                    <a:pt x="1360827" y="3448888"/>
+                  </a:lnTo>
+                  <a:lnTo>
+                    <a:pt x="1289205" y="3451256"/>
+                  </a:lnTo>
+                  <a:lnTo>
+                    <a:pt x="1217582" y="3453464"/>
+                  </a:lnTo>
+                  <a:lnTo>
+                    <a:pt x="1145960" y="3455521"/>
+                  </a:lnTo>
+                  <a:lnTo>
+                    <a:pt x="1074337" y="3457439"/>
+                  </a:lnTo>
+                  <a:lnTo>
+                    <a:pt x="1002715" y="3459226"/>
+                  </a:lnTo>
+                  <a:lnTo>
+                    <a:pt x="931092" y="3460892"/>
+                  </a:lnTo>
+                  <a:lnTo>
+                    <a:pt x="859470" y="3462445"/>
+                  </a:lnTo>
+                  <a:lnTo>
+                    <a:pt x="787847" y="3463892"/>
+                  </a:lnTo>
+                  <a:lnTo>
+                    <a:pt x="716225" y="3465241"/>
+                  </a:lnTo>
+                  <a:lnTo>
+                    <a:pt x="644602" y="3466498"/>
+                  </a:lnTo>
+                  <a:lnTo>
+                    <a:pt x="572980" y="3467670"/>
+                  </a:lnTo>
+                  <a:lnTo>
+                    <a:pt x="501357" y="3468762"/>
+                  </a:lnTo>
+                  <a:lnTo>
+                    <a:pt x="429735" y="3469780"/>
+                  </a:lnTo>
+                  <a:lnTo>
+                    <a:pt x="358112" y="3470729"/>
+                  </a:lnTo>
+                  <a:lnTo>
+                    <a:pt x="286490" y="3471614"/>
+                  </a:lnTo>
+                  <a:lnTo>
+                    <a:pt x="214867" y="3472438"/>
+                  </a:lnTo>
+                  <a:lnTo>
+                    <a:pt x="143245" y="3473206"/>
+                  </a:lnTo>
+                  <a:lnTo>
+                    <a:pt x="71622" y="3473922"/>
+                  </a:lnTo>
+                  <a:lnTo>
+                    <a:pt x="0" y="3474590"/>
                   </a:lnTo>
                   <a:close/>
                 </a:path>
@@ -3505,267 +3505,267 @@
           </p:nvSpPr>
           <p:spPr>
             <a:xfrm>
-              <a:off x="1260887" y="2073503"/>
-              <a:ext cx="5958577" cy="2654135"/>
+              <a:off x="1272304" y="2073503"/>
+              <a:ext cx="5947198" cy="2653386"/>
             </a:xfrm>
             <a:custGeom>
               <a:avLst/>
               <a:pathLst>
-                <a:path w="5958577" h="2654135">
+                <a:path w="5947198" h="2653386">
                   <a:moveTo>
                     <a:pt x="0" y="0"/>
                   </a:moveTo>
                   <a:lnTo>
-                    <a:pt x="54407" y="60143"/>
-                  </a:lnTo>
-                  <a:lnTo>
-                    <a:pt x="126029" y="137528"/>
-                  </a:lnTo>
-                  <a:lnTo>
-                    <a:pt x="197652" y="213164"/>
-                  </a:lnTo>
-                  <a:lnTo>
-                    <a:pt x="269274" y="287091"/>
-                  </a:lnTo>
-                  <a:lnTo>
-                    <a:pt x="340897" y="359346"/>
-                  </a:lnTo>
-                  <a:lnTo>
-                    <a:pt x="412519" y="429968"/>
-                  </a:lnTo>
-                  <a:lnTo>
-                    <a:pt x="484142" y="498994"/>
-                  </a:lnTo>
-                  <a:lnTo>
-                    <a:pt x="555764" y="566459"/>
-                  </a:lnTo>
-                  <a:lnTo>
-                    <a:pt x="627387" y="632400"/>
-                  </a:lnTo>
-                  <a:lnTo>
-                    <a:pt x="699009" y="696850"/>
-                  </a:lnTo>
-                  <a:lnTo>
-                    <a:pt x="770632" y="759843"/>
-                  </a:lnTo>
-                  <a:lnTo>
-                    <a:pt x="842254" y="821413"/>
-                  </a:lnTo>
-                  <a:lnTo>
-                    <a:pt x="913877" y="881591"/>
-                  </a:lnTo>
-                  <a:lnTo>
-                    <a:pt x="985499" y="940408"/>
-                  </a:lnTo>
-                  <a:lnTo>
-                    <a:pt x="1057122" y="997896"/>
-                  </a:lnTo>
-                  <a:lnTo>
-                    <a:pt x="1128744" y="1054085"/>
-                  </a:lnTo>
-                  <a:lnTo>
-                    <a:pt x="1200367" y="1109003"/>
-                  </a:lnTo>
-                  <a:lnTo>
-                    <a:pt x="1271989" y="1162681"/>
-                  </a:lnTo>
-                  <a:lnTo>
-                    <a:pt x="1343612" y="1215145"/>
-                  </a:lnTo>
-                  <a:lnTo>
-                    <a:pt x="1415235" y="1266423"/>
-                  </a:lnTo>
-                  <a:lnTo>
-                    <a:pt x="1486857" y="1316542"/>
-                  </a:lnTo>
-                  <a:lnTo>
-                    <a:pt x="1558480" y="1365528"/>
-                  </a:lnTo>
-                  <a:lnTo>
-                    <a:pt x="1630102" y="1413407"/>
-                  </a:lnTo>
-                  <a:lnTo>
-                    <a:pt x="1701725" y="1460204"/>
-                  </a:lnTo>
-                  <a:lnTo>
-                    <a:pt x="1773347" y="1505943"/>
-                  </a:lnTo>
-                  <a:lnTo>
-                    <a:pt x="1844970" y="1550648"/>
-                  </a:lnTo>
-                  <a:lnTo>
-                    <a:pt x="1916592" y="1594342"/>
-                  </a:lnTo>
-                  <a:lnTo>
-                    <a:pt x="1988215" y="1637049"/>
-                  </a:lnTo>
-                  <a:lnTo>
-                    <a:pt x="2059837" y="1678791"/>
-                  </a:lnTo>
-                  <a:lnTo>
-                    <a:pt x="2131460" y="1719589"/>
-                  </a:lnTo>
-                  <a:lnTo>
-                    <a:pt x="2203082" y="1759465"/>
-                  </a:lnTo>
-                  <a:lnTo>
-                    <a:pt x="2274705" y="1798439"/>
-                  </a:lnTo>
-                  <a:lnTo>
-                    <a:pt x="2346327" y="1836533"/>
-                  </a:lnTo>
-                  <a:lnTo>
-                    <a:pt x="2417950" y="1873766"/>
-                  </a:lnTo>
-                  <a:lnTo>
-                    <a:pt x="2489572" y="1910157"/>
-                  </a:lnTo>
-                  <a:lnTo>
-                    <a:pt x="2561195" y="1945725"/>
-                  </a:lnTo>
-                  <a:lnTo>
-                    <a:pt x="2632817" y="1980490"/>
-                  </a:lnTo>
-                  <a:lnTo>
-                    <a:pt x="2704440" y="2014468"/>
-                  </a:lnTo>
-                  <a:lnTo>
-                    <a:pt x="2776063" y="2047679"/>
-                  </a:lnTo>
-                  <a:lnTo>
-                    <a:pt x="2847685" y="2080139"/>
-                  </a:lnTo>
-                  <a:lnTo>
-                    <a:pt x="2919308" y="2111865"/>
-                  </a:lnTo>
-                  <a:lnTo>
-                    <a:pt x="2990930" y="2142875"/>
-                  </a:lnTo>
-                  <a:lnTo>
-                    <a:pt x="3062553" y="2173183"/>
-                  </a:lnTo>
-                  <a:lnTo>
-                    <a:pt x="3134175" y="2202806"/>
-                  </a:lnTo>
-                  <a:lnTo>
-                    <a:pt x="3205798" y="2231760"/>
-                  </a:lnTo>
-                  <a:lnTo>
-                    <a:pt x="3277420" y="2260059"/>
-                  </a:lnTo>
-                  <a:lnTo>
-                    <a:pt x="3349043" y="2287718"/>
-                  </a:lnTo>
-                  <a:lnTo>
-                    <a:pt x="3420665" y="2314753"/>
-                  </a:lnTo>
-                  <a:lnTo>
-                    <a:pt x="3492288" y="2341176"/>
-                  </a:lnTo>
-                  <a:lnTo>
-                    <a:pt x="3563910" y="2367002"/>
-                  </a:lnTo>
-                  <a:lnTo>
-                    <a:pt x="3635533" y="2392244"/>
-                  </a:lnTo>
-                  <a:lnTo>
-                    <a:pt x="3707155" y="2416916"/>
-                  </a:lnTo>
-                  <a:lnTo>
-                    <a:pt x="3778778" y="2441030"/>
-                  </a:lnTo>
-                  <a:lnTo>
-                    <a:pt x="3850400" y="2464599"/>
-                  </a:lnTo>
-                  <a:lnTo>
-                    <a:pt x="3922023" y="2487635"/>
-                  </a:lnTo>
-                  <a:lnTo>
-                    <a:pt x="3993645" y="2510150"/>
-                  </a:lnTo>
-                  <a:lnTo>
-                    <a:pt x="4065268" y="2532157"/>
-                  </a:lnTo>
-                  <a:lnTo>
-                    <a:pt x="4136891" y="2553666"/>
-                  </a:lnTo>
-                  <a:lnTo>
-                    <a:pt x="4208513" y="2574689"/>
-                  </a:lnTo>
-                  <a:lnTo>
-                    <a:pt x="4280136" y="2595237"/>
-                  </a:lnTo>
-                  <a:lnTo>
-                    <a:pt x="4351758" y="2615320"/>
-                  </a:lnTo>
-                  <a:lnTo>
-                    <a:pt x="4423381" y="2634950"/>
-                  </a:lnTo>
-                  <a:lnTo>
-                    <a:pt x="4495003" y="2654135"/>
-                  </a:lnTo>
-                  <a:lnTo>
-                    <a:pt x="4566626" y="2594426"/>
-                  </a:lnTo>
-                  <a:lnTo>
-                    <a:pt x="4638248" y="2529728"/>
-                  </a:lnTo>
-                  <a:lnTo>
-                    <a:pt x="4709871" y="2460323"/>
-                  </a:lnTo>
-                  <a:lnTo>
-                    <a:pt x="4781493" y="2385869"/>
-                  </a:lnTo>
-                  <a:lnTo>
-                    <a:pt x="4853116" y="2305999"/>
-                  </a:lnTo>
-                  <a:lnTo>
-                    <a:pt x="4924738" y="2220318"/>
-                  </a:lnTo>
-                  <a:lnTo>
-                    <a:pt x="4996361" y="2128403"/>
-                  </a:lnTo>
-                  <a:lnTo>
-                    <a:pt x="5067983" y="2029802"/>
-                  </a:lnTo>
-                  <a:lnTo>
-                    <a:pt x="5139606" y="1924028"/>
-                  </a:lnTo>
-                  <a:lnTo>
-                    <a:pt x="5211228" y="1810559"/>
-                  </a:lnTo>
-                  <a:lnTo>
-                    <a:pt x="5282851" y="1688834"/>
-                  </a:lnTo>
-                  <a:lnTo>
-                    <a:pt x="5354473" y="1558255"/>
-                  </a:lnTo>
-                  <a:lnTo>
-                    <a:pt x="5426096" y="1418175"/>
-                  </a:lnTo>
-                  <a:lnTo>
-                    <a:pt x="5497719" y="1267905"/>
-                  </a:lnTo>
-                  <a:lnTo>
-                    <a:pt x="5569341" y="1106703"/>
-                  </a:lnTo>
-                  <a:lnTo>
-                    <a:pt x="5640964" y="933773"/>
-                  </a:lnTo>
-                  <a:lnTo>
-                    <a:pt x="5712586" y="748263"/>
-                  </a:lnTo>
-                  <a:lnTo>
-                    <a:pt x="5784209" y="549257"/>
-                  </a:lnTo>
-                  <a:lnTo>
-                    <a:pt x="5855831" y="335773"/>
-                  </a:lnTo>
-                  <a:lnTo>
-                    <a:pt x="5927454" y="106758"/>
-                  </a:lnTo>
-                  <a:lnTo>
-                    <a:pt x="5958577" y="0"/>
+                    <a:pt x="42989" y="47786"/>
+                  </a:lnTo>
+                  <a:lnTo>
+                    <a:pt x="114612" y="125596"/>
+                  </a:lnTo>
+                  <a:lnTo>
+                    <a:pt x="186234" y="201645"/>
+                  </a:lnTo>
+                  <a:lnTo>
+                    <a:pt x="257857" y="275971"/>
+                  </a:lnTo>
+                  <a:lnTo>
+                    <a:pt x="329480" y="348614"/>
+                  </a:lnTo>
+                  <a:lnTo>
+                    <a:pt x="401102" y="419613"/>
+                  </a:lnTo>
+                  <a:lnTo>
+                    <a:pt x="472725" y="489003"/>
+                  </a:lnTo>
+                  <a:lnTo>
+                    <a:pt x="544347" y="556822"/>
+                  </a:lnTo>
+                  <a:lnTo>
+                    <a:pt x="615970" y="623105"/>
+                  </a:lnTo>
+                  <a:lnTo>
+                    <a:pt x="687592" y="687887"/>
+                  </a:lnTo>
+                  <a:lnTo>
+                    <a:pt x="759215" y="751202"/>
+                  </a:lnTo>
+                  <a:lnTo>
+                    <a:pt x="830837" y="813083"/>
+                  </a:lnTo>
+                  <a:lnTo>
+                    <a:pt x="902460" y="873562"/>
+                  </a:lnTo>
+                  <a:lnTo>
+                    <a:pt x="974082" y="932672"/>
+                  </a:lnTo>
+                  <a:lnTo>
+                    <a:pt x="1045705" y="990444"/>
+                  </a:lnTo>
+                  <a:lnTo>
+                    <a:pt x="1117327" y="1046907"/>
+                  </a:lnTo>
+                  <a:lnTo>
+                    <a:pt x="1188950" y="1102092"/>
+                  </a:lnTo>
+                  <a:lnTo>
+                    <a:pt x="1260572" y="1156027"/>
+                  </a:lnTo>
+                  <a:lnTo>
+                    <a:pt x="1332195" y="1208740"/>
+                  </a:lnTo>
+                  <a:lnTo>
+                    <a:pt x="1403817" y="1260260"/>
+                  </a:lnTo>
+                  <a:lnTo>
+                    <a:pt x="1475440" y="1310613"/>
+                  </a:lnTo>
+                  <a:lnTo>
+                    <a:pt x="1547062" y="1359825"/>
+                  </a:lnTo>
+                  <a:lnTo>
+                    <a:pt x="1618685" y="1407924"/>
+                  </a:lnTo>
+                  <a:lnTo>
+                    <a:pt x="1690308" y="1454933"/>
+                  </a:lnTo>
+                  <a:lnTo>
+                    <a:pt x="1761930" y="1500877"/>
+                  </a:lnTo>
+                  <a:lnTo>
+                    <a:pt x="1833553" y="1545781"/>
+                  </a:lnTo>
+                  <a:lnTo>
+                    <a:pt x="1905175" y="1589668"/>
+                  </a:lnTo>
+                  <a:lnTo>
+                    <a:pt x="1976798" y="1632561"/>
+                  </a:lnTo>
+                  <a:lnTo>
+                    <a:pt x="2048420" y="1674483"/>
+                  </a:lnTo>
+                  <a:lnTo>
+                    <a:pt x="2120043" y="1715456"/>
+                  </a:lnTo>
+                  <a:lnTo>
+                    <a:pt x="2191665" y="1755500"/>
+                  </a:lnTo>
+                  <a:lnTo>
+                    <a:pt x="2263288" y="1794638"/>
+                  </a:lnTo>
+                  <a:lnTo>
+                    <a:pt x="2334910" y="1832890"/>
+                  </a:lnTo>
+                  <a:lnTo>
+                    <a:pt x="2406533" y="1870275"/>
+                  </a:lnTo>
+                  <a:lnTo>
+                    <a:pt x="2478155" y="1906813"/>
+                  </a:lnTo>
+                  <a:lnTo>
+                    <a:pt x="2549778" y="1942525"/>
+                  </a:lnTo>
+                  <a:lnTo>
+                    <a:pt x="2621400" y="1977427"/>
+                  </a:lnTo>
+                  <a:lnTo>
+                    <a:pt x="2693023" y="2011539"/>
+                  </a:lnTo>
+                  <a:lnTo>
+                    <a:pt x="2764645" y="2044879"/>
+                  </a:lnTo>
+                  <a:lnTo>
+                    <a:pt x="2836268" y="2077463"/>
+                  </a:lnTo>
+                  <a:lnTo>
+                    <a:pt x="2907890" y="2109310"/>
+                  </a:lnTo>
+                  <a:lnTo>
+                    <a:pt x="2979513" y="2140435"/>
+                  </a:lnTo>
+                  <a:lnTo>
+                    <a:pt x="3051136" y="2170856"/>
+                  </a:lnTo>
+                  <a:lnTo>
+                    <a:pt x="3122758" y="2200587"/>
+                  </a:lnTo>
+                  <a:lnTo>
+                    <a:pt x="3194381" y="2229646"/>
+                  </a:lnTo>
+                  <a:lnTo>
+                    <a:pt x="3266003" y="2258046"/>
+                  </a:lnTo>
+                  <a:lnTo>
+                    <a:pt x="3337626" y="2285803"/>
+                  </a:lnTo>
+                  <a:lnTo>
+                    <a:pt x="3409248" y="2312932"/>
+                  </a:lnTo>
+                  <a:lnTo>
+                    <a:pt x="3480871" y="2339446"/>
+                  </a:lnTo>
+                  <a:lnTo>
+                    <a:pt x="3552493" y="2365360"/>
+                  </a:lnTo>
+                  <a:lnTo>
+                    <a:pt x="3624116" y="2390687"/>
+                  </a:lnTo>
+                  <a:lnTo>
+                    <a:pt x="3695738" y="2415440"/>
+                  </a:lnTo>
+                  <a:lnTo>
+                    <a:pt x="3767361" y="2439633"/>
+                  </a:lnTo>
+                  <a:lnTo>
+                    <a:pt x="3838983" y="2463278"/>
+                  </a:lnTo>
+                  <a:lnTo>
+                    <a:pt x="3910606" y="2486387"/>
+                  </a:lnTo>
+                  <a:lnTo>
+                    <a:pt x="3982228" y="2508974"/>
+                  </a:lnTo>
+                  <a:lnTo>
+                    <a:pt x="4053851" y="2531048"/>
+                  </a:lnTo>
+                  <a:lnTo>
+                    <a:pt x="4125473" y="2552623"/>
+                  </a:lnTo>
+                  <a:lnTo>
+                    <a:pt x="4197096" y="2573709"/>
+                  </a:lnTo>
+                  <a:lnTo>
+                    <a:pt x="4268718" y="2594318"/>
+                  </a:lnTo>
+                  <a:lnTo>
+                    <a:pt x="4340341" y="2614460"/>
+                  </a:lnTo>
+                  <a:lnTo>
+                    <a:pt x="4411964" y="2634146"/>
+                  </a:lnTo>
+                  <a:lnTo>
+                    <a:pt x="4483586" y="2653386"/>
+                  </a:lnTo>
+                  <a:lnTo>
+                    <a:pt x="4555209" y="2596771"/>
+                  </a:lnTo>
+                  <a:lnTo>
+                    <a:pt x="4626831" y="2532116"/>
+                  </a:lnTo>
+                  <a:lnTo>
+                    <a:pt x="4698454" y="2462748"/>
+                  </a:lnTo>
+                  <a:lnTo>
+                    <a:pt x="4770076" y="2388324"/>
+                  </a:lnTo>
+                  <a:lnTo>
+                    <a:pt x="4841699" y="2308475"/>
+                  </a:lnTo>
+                  <a:lnTo>
+                    <a:pt x="4913321" y="2222805"/>
+                  </a:lnTo>
+                  <a:lnTo>
+                    <a:pt x="4984944" y="2130891"/>
+                  </a:lnTo>
+                  <a:lnTo>
+                    <a:pt x="5056566" y="2032277"/>
+                  </a:lnTo>
+                  <a:lnTo>
+                    <a:pt x="5128189" y="1926474"/>
+                  </a:lnTo>
+                  <a:lnTo>
+                    <a:pt x="5199811" y="1812959"/>
+                  </a:lnTo>
+                  <a:lnTo>
+                    <a:pt x="5271434" y="1691170"/>
+                  </a:lnTo>
+                  <a:lnTo>
+                    <a:pt x="5343056" y="1560503"/>
+                  </a:lnTo>
+                  <a:lnTo>
+                    <a:pt x="5414679" y="1420311"/>
+                  </a:lnTo>
+                  <a:lnTo>
+                    <a:pt x="5486301" y="1269900"/>
+                  </a:lnTo>
+                  <a:lnTo>
+                    <a:pt x="5557924" y="1108525"/>
+                  </a:lnTo>
+                  <a:lnTo>
+                    <a:pt x="5629546" y="935387"/>
+                  </a:lnTo>
+                  <a:lnTo>
+                    <a:pt x="5701169" y="749628"/>
+                  </a:lnTo>
+                  <a:lnTo>
+                    <a:pt x="5772792" y="550329"/>
+                  </a:lnTo>
+                  <a:lnTo>
+                    <a:pt x="5844414" y="336502"/>
+                  </a:lnTo>
+                  <a:lnTo>
+                    <a:pt x="5916037" y="107088"/>
+                  </a:lnTo>
+                  <a:lnTo>
+                    <a:pt x="5947198" y="0"/>
                   </a:lnTo>
                 </a:path>
               </a:pathLst>
@@ -3785,312 +3785,312 @@
           </p:nvSpPr>
           <p:spPr>
             <a:xfrm>
-              <a:off x="1172049" y="4728239"/>
-              <a:ext cx="7090630" cy="819749"/>
+              <a:off x="1172049" y="4730536"/>
+              <a:ext cx="7090630" cy="817557"/>
             </a:xfrm>
             <a:custGeom>
               <a:avLst/>
               <a:pathLst>
-                <a:path w="7090630" h="819749">
+                <a:path w="7090630" h="817557">
                   <a:moveTo>
-                    <a:pt x="7090630" y="456315"/>
+                    <a:pt x="7090630" y="454250"/>
                   </a:moveTo>
                   <a:lnTo>
-                    <a:pt x="7019007" y="447696"/>
-                  </a:lnTo>
-                  <a:lnTo>
-                    <a:pt x="6947385" y="438877"/>
-                  </a:lnTo>
-                  <a:lnTo>
-                    <a:pt x="6875762" y="429855"/>
-                  </a:lnTo>
-                  <a:lnTo>
-                    <a:pt x="6804139" y="420624"/>
-                  </a:lnTo>
-                  <a:lnTo>
-                    <a:pt x="6732517" y="411180"/>
-                  </a:lnTo>
-                  <a:lnTo>
-                    <a:pt x="6660894" y="401517"/>
-                  </a:lnTo>
-                  <a:lnTo>
-                    <a:pt x="6589272" y="391631"/>
-                  </a:lnTo>
-                  <a:lnTo>
-                    <a:pt x="6517649" y="381516"/>
-                  </a:lnTo>
-                  <a:lnTo>
-                    <a:pt x="6446027" y="371167"/>
-                  </a:lnTo>
-                  <a:lnTo>
-                    <a:pt x="6374404" y="360579"/>
-                  </a:lnTo>
-                  <a:lnTo>
-                    <a:pt x="6302782" y="349746"/>
-                  </a:lnTo>
-                  <a:lnTo>
-                    <a:pt x="6231159" y="338663"/>
-                  </a:lnTo>
-                  <a:lnTo>
-                    <a:pt x="6159537" y="327323"/>
-                  </a:lnTo>
-                  <a:lnTo>
-                    <a:pt x="6087914" y="315721"/>
-                  </a:lnTo>
-                  <a:lnTo>
-                    <a:pt x="6016292" y="303850"/>
-                  </a:lnTo>
-                  <a:lnTo>
-                    <a:pt x="5944669" y="291705"/>
-                  </a:lnTo>
-                  <a:lnTo>
-                    <a:pt x="5873047" y="279280"/>
-                  </a:lnTo>
-                  <a:lnTo>
-                    <a:pt x="5801424" y="266566"/>
-                  </a:lnTo>
-                  <a:lnTo>
-                    <a:pt x="5729802" y="253559"/>
-                  </a:lnTo>
-                  <a:lnTo>
-                    <a:pt x="5658179" y="240251"/>
-                  </a:lnTo>
-                  <a:lnTo>
-                    <a:pt x="5586557" y="226636"/>
-                  </a:lnTo>
-                  <a:lnTo>
-                    <a:pt x="5514934" y="212705"/>
-                  </a:lnTo>
-                  <a:lnTo>
-                    <a:pt x="5443311" y="198452"/>
-                  </a:lnTo>
-                  <a:lnTo>
-                    <a:pt x="5371689" y="183870"/>
-                  </a:lnTo>
-                  <a:lnTo>
-                    <a:pt x="5300066" y="168950"/>
-                  </a:lnTo>
-                  <a:lnTo>
-                    <a:pt x="5228444" y="153686"/>
-                  </a:lnTo>
-                  <a:lnTo>
-                    <a:pt x="5156821" y="138068"/>
-                  </a:lnTo>
-                  <a:lnTo>
-                    <a:pt x="5085199" y="122089"/>
-                  </a:lnTo>
-                  <a:lnTo>
-                    <a:pt x="5013576" y="105741"/>
-                  </a:lnTo>
-                  <a:lnTo>
-                    <a:pt x="4941954" y="89015"/>
-                  </a:lnTo>
-                  <a:lnTo>
-                    <a:pt x="4870331" y="71902"/>
-                  </a:lnTo>
-                  <a:lnTo>
-                    <a:pt x="4798709" y="54393"/>
-                  </a:lnTo>
-                  <a:lnTo>
-                    <a:pt x="4727086" y="36479"/>
-                  </a:lnTo>
-                  <a:lnTo>
-                    <a:pt x="4655464" y="18150"/>
+                    <a:pt x="7019007" y="445620"/>
+                  </a:lnTo>
+                  <a:lnTo>
+                    <a:pt x="6947385" y="436789"/>
+                  </a:lnTo>
+                  <a:lnTo>
+                    <a:pt x="6875762" y="427755"/>
+                  </a:lnTo>
+                  <a:lnTo>
+                    <a:pt x="6804139" y="418510"/>
+                  </a:lnTo>
+                  <a:lnTo>
+                    <a:pt x="6732517" y="409052"/>
+                  </a:lnTo>
+                  <a:lnTo>
+                    <a:pt x="6660894" y="399375"/>
+                  </a:lnTo>
+                  <a:lnTo>
+                    <a:pt x="6589272" y="389473"/>
+                  </a:lnTo>
+                  <a:lnTo>
+                    <a:pt x="6517649" y="379342"/>
+                  </a:lnTo>
+                  <a:lnTo>
+                    <a:pt x="6446027" y="368976"/>
+                  </a:lnTo>
+                  <a:lnTo>
+                    <a:pt x="6374404" y="358370"/>
+                  </a:lnTo>
+                  <a:lnTo>
+                    <a:pt x="6302782" y="347518"/>
+                  </a:lnTo>
+                  <a:lnTo>
+                    <a:pt x="6231159" y="336415"/>
+                  </a:lnTo>
+                  <a:lnTo>
+                    <a:pt x="6159537" y="325054"/>
+                  </a:lnTo>
+                  <a:lnTo>
+                    <a:pt x="6087914" y="313430"/>
+                  </a:lnTo>
+                  <a:lnTo>
+                    <a:pt x="6016292" y="301537"/>
+                  </a:lnTo>
+                  <a:lnTo>
+                    <a:pt x="5944669" y="289368"/>
+                  </a:lnTo>
+                  <a:lnTo>
+                    <a:pt x="5873047" y="276918"/>
+                  </a:lnTo>
+                  <a:lnTo>
+                    <a:pt x="5801424" y="264179"/>
+                  </a:lnTo>
+                  <a:lnTo>
+                    <a:pt x="5729802" y="251144"/>
+                  </a:lnTo>
+                  <a:lnTo>
+                    <a:pt x="5658179" y="237808"/>
+                  </a:lnTo>
+                  <a:lnTo>
+                    <a:pt x="5586557" y="224163"/>
+                  </a:lnTo>
+                  <a:lnTo>
+                    <a:pt x="5514934" y="210201"/>
+                  </a:lnTo>
+                  <a:lnTo>
+                    <a:pt x="5443311" y="195916"/>
+                  </a:lnTo>
+                  <a:lnTo>
+                    <a:pt x="5371689" y="181300"/>
+                  </a:lnTo>
+                  <a:lnTo>
+                    <a:pt x="5300066" y="166345"/>
+                  </a:lnTo>
+                  <a:lnTo>
+                    <a:pt x="5228444" y="151044"/>
+                  </a:lnTo>
+                  <a:lnTo>
+                    <a:pt x="5156821" y="135389"/>
+                  </a:lnTo>
+                  <a:lnTo>
+                    <a:pt x="5085199" y="119370"/>
+                  </a:lnTo>
+                  <a:lnTo>
+                    <a:pt x="5013576" y="102981"/>
+                  </a:lnTo>
+                  <a:lnTo>
+                    <a:pt x="4941954" y="86211"/>
+                  </a:lnTo>
+                  <a:lnTo>
+                    <a:pt x="4870331" y="69053"/>
+                  </a:lnTo>
+                  <a:lnTo>
+                    <a:pt x="4798709" y="51498"/>
+                  </a:lnTo>
+                  <a:lnTo>
+                    <a:pt x="4727086" y="33535"/>
+                  </a:lnTo>
+                  <a:lnTo>
+                    <a:pt x="4655464" y="15157"/>
                   </a:lnTo>
                   <a:lnTo>
                     <a:pt x="4583841" y="0"/>
                   </a:lnTo>
                   <a:lnTo>
-                    <a:pt x="4512219" y="56220"/>
-                  </a:lnTo>
-                  <a:lnTo>
-                    <a:pt x="4440596" y="108628"/>
-                  </a:lnTo>
-                  <a:lnTo>
-                    <a:pt x="4368974" y="157481"/>
-                  </a:lnTo>
-                  <a:lnTo>
-                    <a:pt x="4297351" y="203022"/>
-                  </a:lnTo>
-                  <a:lnTo>
-                    <a:pt x="4225729" y="245474"/>
-                  </a:lnTo>
-                  <a:lnTo>
-                    <a:pt x="4154106" y="285047"/>
-                  </a:lnTo>
-                  <a:lnTo>
-                    <a:pt x="4082483" y="321937"/>
-                  </a:lnTo>
-                  <a:lnTo>
-                    <a:pt x="4010861" y="356325"/>
-                  </a:lnTo>
-                  <a:lnTo>
-                    <a:pt x="3939238" y="388380"/>
-                  </a:lnTo>
-                  <a:lnTo>
-                    <a:pt x="3867616" y="418262"/>
-                  </a:lnTo>
-                  <a:lnTo>
-                    <a:pt x="3795993" y="446117"/>
-                  </a:lnTo>
-                  <a:lnTo>
-                    <a:pt x="3724371" y="472084"/>
-                  </a:lnTo>
-                  <a:lnTo>
-                    <a:pt x="3652748" y="496289"/>
-                  </a:lnTo>
-                  <a:lnTo>
-                    <a:pt x="3581126" y="518853"/>
-                  </a:lnTo>
-                  <a:lnTo>
-                    <a:pt x="3509503" y="539887"/>
-                  </a:lnTo>
-                  <a:lnTo>
-                    <a:pt x="3437881" y="559494"/>
-                  </a:lnTo>
-                  <a:lnTo>
-                    <a:pt x="3366258" y="577772"/>
-                  </a:lnTo>
-                  <a:lnTo>
-                    <a:pt x="3294636" y="594810"/>
-                  </a:lnTo>
-                  <a:lnTo>
-                    <a:pt x="3223013" y="610692"/>
-                  </a:lnTo>
-                  <a:lnTo>
-                    <a:pt x="3151391" y="625498"/>
-                  </a:lnTo>
-                  <a:lnTo>
-                    <a:pt x="3079768" y="639299"/>
-                  </a:lnTo>
-                  <a:lnTo>
-                    <a:pt x="3008146" y="652165"/>
-                  </a:lnTo>
-                  <a:lnTo>
-                    <a:pt x="2936523" y="664157"/>
-                  </a:lnTo>
-                  <a:lnTo>
-                    <a:pt x="2864901" y="675337"/>
-                  </a:lnTo>
-                  <a:lnTo>
-                    <a:pt x="2793278" y="685759"/>
-                  </a:lnTo>
-                  <a:lnTo>
-                    <a:pt x="2721655" y="695473"/>
-                  </a:lnTo>
-                  <a:lnTo>
-                    <a:pt x="2650033" y="704529"/>
-                  </a:lnTo>
-                  <a:lnTo>
-                    <a:pt x="2578410" y="712971"/>
-                  </a:lnTo>
-                  <a:lnTo>
-                    <a:pt x="2506788" y="720840"/>
-                  </a:lnTo>
-                  <a:lnTo>
-                    <a:pt x="2435165" y="728176"/>
-                  </a:lnTo>
-                  <a:lnTo>
-                    <a:pt x="2363543" y="735014"/>
-                  </a:lnTo>
-                  <a:lnTo>
-                    <a:pt x="2291920" y="741389"/>
-                  </a:lnTo>
-                  <a:lnTo>
-                    <a:pt x="2220298" y="747331"/>
-                  </a:lnTo>
-                  <a:lnTo>
-                    <a:pt x="2148675" y="752870"/>
-                  </a:lnTo>
-                  <a:lnTo>
-                    <a:pt x="2077053" y="758033"/>
-                  </a:lnTo>
-                  <a:lnTo>
-                    <a:pt x="2005430" y="762847"/>
-                  </a:lnTo>
-                  <a:lnTo>
-                    <a:pt x="1933808" y="767334"/>
-                  </a:lnTo>
-                  <a:lnTo>
-                    <a:pt x="1862185" y="771516"/>
-                  </a:lnTo>
-                  <a:lnTo>
-                    <a:pt x="1790563" y="775415"/>
-                  </a:lnTo>
-                  <a:lnTo>
-                    <a:pt x="1718940" y="779050"/>
-                  </a:lnTo>
-                  <a:lnTo>
-                    <a:pt x="1647318" y="782438"/>
-                  </a:lnTo>
-                  <a:lnTo>
-                    <a:pt x="1575695" y="785596"/>
-                  </a:lnTo>
-                  <a:lnTo>
-                    <a:pt x="1504073" y="788540"/>
-                  </a:lnTo>
-                  <a:lnTo>
-                    <a:pt x="1432450" y="791285"/>
-                  </a:lnTo>
-                  <a:lnTo>
-                    <a:pt x="1360827" y="793843"/>
-                  </a:lnTo>
-                  <a:lnTo>
-                    <a:pt x="1289205" y="796228"/>
-                  </a:lnTo>
-                  <a:lnTo>
-                    <a:pt x="1217582" y="798451"/>
-                  </a:lnTo>
-                  <a:lnTo>
-                    <a:pt x="1145960" y="800524"/>
-                  </a:lnTo>
-                  <a:lnTo>
-                    <a:pt x="1074337" y="802455"/>
-                  </a:lnTo>
-                  <a:lnTo>
-                    <a:pt x="1002715" y="804256"/>
-                  </a:lnTo>
-                  <a:lnTo>
-                    <a:pt x="931092" y="805935"/>
-                  </a:lnTo>
-                  <a:lnTo>
-                    <a:pt x="859470" y="807500"/>
-                  </a:lnTo>
-                  <a:lnTo>
-                    <a:pt x="787847" y="808958"/>
-                  </a:lnTo>
-                  <a:lnTo>
-                    <a:pt x="716225" y="810318"/>
-                  </a:lnTo>
-                  <a:lnTo>
-                    <a:pt x="644602" y="811586"/>
-                  </a:lnTo>
-                  <a:lnTo>
-                    <a:pt x="572980" y="812767"/>
-                  </a:lnTo>
-                  <a:lnTo>
-                    <a:pt x="501357" y="813869"/>
-                  </a:lnTo>
-                  <a:lnTo>
-                    <a:pt x="429735" y="814896"/>
-                  </a:lnTo>
-                  <a:lnTo>
-                    <a:pt x="358112" y="815853"/>
-                  </a:lnTo>
-                  <a:lnTo>
-                    <a:pt x="286490" y="816745"/>
-                  </a:lnTo>
-                  <a:lnTo>
-                    <a:pt x="214867" y="817577"/>
-                  </a:lnTo>
-                  <a:lnTo>
-                    <a:pt x="143245" y="818352"/>
-                  </a:lnTo>
-                  <a:lnTo>
-                    <a:pt x="71622" y="819075"/>
-                  </a:lnTo>
-                  <a:lnTo>
-                    <a:pt x="0" y="819749"/>
+                    <a:pt x="4512219" y="56167"/>
+                  </a:lnTo>
+                  <a:lnTo>
+                    <a:pt x="4440596" y="108519"/>
+                  </a:lnTo>
+                  <a:lnTo>
+                    <a:pt x="4368974" y="157314"/>
+                  </a:lnTo>
+                  <a:lnTo>
+                    <a:pt x="4297351" y="202793"/>
+                  </a:lnTo>
+                  <a:lnTo>
+                    <a:pt x="4225729" y="245183"/>
+                  </a:lnTo>
+                  <a:lnTo>
+                    <a:pt x="4154106" y="284693"/>
+                  </a:lnTo>
+                  <a:lnTo>
+                    <a:pt x="4082483" y="321518"/>
+                  </a:lnTo>
+                  <a:lnTo>
+                    <a:pt x="4010861" y="355842"/>
+                  </a:lnTo>
+                  <a:lnTo>
+                    <a:pt x="3939238" y="387833"/>
+                  </a:lnTo>
+                  <a:lnTo>
+                    <a:pt x="3867616" y="417651"/>
+                  </a:lnTo>
+                  <a:lnTo>
+                    <a:pt x="3795993" y="445443"/>
+                  </a:lnTo>
+                  <a:lnTo>
+                    <a:pt x="3724371" y="471347"/>
+                  </a:lnTo>
+                  <a:lnTo>
+                    <a:pt x="3652748" y="495491"/>
+                  </a:lnTo>
+                  <a:lnTo>
+                    <a:pt x="3581126" y="517995"/>
+                  </a:lnTo>
+                  <a:lnTo>
+                    <a:pt x="3509503" y="538969"/>
+                  </a:lnTo>
+                  <a:lnTo>
+                    <a:pt x="3437881" y="558519"/>
+                  </a:lnTo>
+                  <a:lnTo>
+                    <a:pt x="3366258" y="576740"/>
+                  </a:lnTo>
+                  <a:lnTo>
+                    <a:pt x="3294636" y="593724"/>
+                  </a:lnTo>
+                  <a:lnTo>
+                    <a:pt x="3223013" y="609553"/>
+                  </a:lnTo>
+                  <a:lnTo>
+                    <a:pt x="3151391" y="624307"/>
+                  </a:lnTo>
+                  <a:lnTo>
+                    <a:pt x="3079768" y="638059"/>
+                  </a:lnTo>
+                  <a:lnTo>
+                    <a:pt x="3008146" y="650876"/>
+                  </a:lnTo>
+                  <a:lnTo>
+                    <a:pt x="2936523" y="662823"/>
+                  </a:lnTo>
+                  <a:lnTo>
+                    <a:pt x="2864901" y="673958"/>
+                  </a:lnTo>
+                  <a:lnTo>
+                    <a:pt x="2793278" y="684336"/>
+                  </a:lnTo>
+                  <a:lnTo>
+                    <a:pt x="2721655" y="694009"/>
+                  </a:lnTo>
+                  <a:lnTo>
+                    <a:pt x="2650033" y="703025"/>
+                  </a:lnTo>
+                  <a:lnTo>
+                    <a:pt x="2578410" y="711429"/>
+                  </a:lnTo>
+                  <a:lnTo>
+                    <a:pt x="2506788" y="719261"/>
+                  </a:lnTo>
+                  <a:lnTo>
+                    <a:pt x="2435165" y="726562"/>
+                  </a:lnTo>
+                  <a:lnTo>
+                    <a:pt x="2363543" y="733366"/>
+                  </a:lnTo>
+                  <a:lnTo>
+                    <a:pt x="2291920" y="739708"/>
+                  </a:lnTo>
+                  <a:lnTo>
+                    <a:pt x="2220298" y="745620"/>
+                  </a:lnTo>
+                  <a:lnTo>
+                    <a:pt x="2148675" y="751129"/>
+                  </a:lnTo>
+                  <a:lnTo>
+                    <a:pt x="2077053" y="756264"/>
+                  </a:lnTo>
+                  <a:lnTo>
+                    <a:pt x="2005430" y="761051"/>
+                  </a:lnTo>
+                  <a:lnTo>
+                    <a:pt x="1933808" y="765512"/>
+                  </a:lnTo>
+                  <a:lnTo>
+                    <a:pt x="1862185" y="769670"/>
+                  </a:lnTo>
+                  <a:lnTo>
+                    <a:pt x="1790563" y="773546"/>
+                  </a:lnTo>
+                  <a:lnTo>
+                    <a:pt x="1718940" y="777158"/>
+                  </a:lnTo>
+                  <a:lnTo>
+                    <a:pt x="1647318" y="780525"/>
+                  </a:lnTo>
+                  <a:lnTo>
+                    <a:pt x="1575695" y="783663"/>
+                  </a:lnTo>
+                  <a:lnTo>
+                    <a:pt x="1504073" y="786588"/>
+                  </a:lnTo>
+                  <a:lnTo>
+                    <a:pt x="1432450" y="789314"/>
+                  </a:lnTo>
+                  <a:lnTo>
+                    <a:pt x="1360827" y="791855"/>
+                  </a:lnTo>
+                  <a:lnTo>
+                    <a:pt x="1289205" y="794223"/>
+                  </a:lnTo>
+                  <a:lnTo>
+                    <a:pt x="1217582" y="796431"/>
+                  </a:lnTo>
+                  <a:lnTo>
+                    <a:pt x="1145960" y="798488"/>
+                  </a:lnTo>
+                  <a:lnTo>
+                    <a:pt x="1074337" y="800406"/>
+                  </a:lnTo>
+                  <a:lnTo>
+                    <a:pt x="1002715" y="802193"/>
+                  </a:lnTo>
+                  <a:lnTo>
+                    <a:pt x="931092" y="803859"/>
+                  </a:lnTo>
+                  <a:lnTo>
+                    <a:pt x="859470" y="805412"/>
+                  </a:lnTo>
+                  <a:lnTo>
+                    <a:pt x="787847" y="806859"/>
+                  </a:lnTo>
+                  <a:lnTo>
+                    <a:pt x="716225" y="808208"/>
+                  </a:lnTo>
+                  <a:lnTo>
+                    <a:pt x="644602" y="809465"/>
+                  </a:lnTo>
+                  <a:lnTo>
+                    <a:pt x="572980" y="810637"/>
+                  </a:lnTo>
+                  <a:lnTo>
+                    <a:pt x="501357" y="811729"/>
+                  </a:lnTo>
+                  <a:lnTo>
+                    <a:pt x="429735" y="812747"/>
+                  </a:lnTo>
+                  <a:lnTo>
+                    <a:pt x="358112" y="813696"/>
+                  </a:lnTo>
+                  <a:lnTo>
+                    <a:pt x="286490" y="814581"/>
+                  </a:lnTo>
+                  <a:lnTo>
+                    <a:pt x="214867" y="815405"/>
+                  </a:lnTo>
+                  <a:lnTo>
+                    <a:pt x="143245" y="816173"/>
+                  </a:lnTo>
+                  <a:lnTo>
+                    <a:pt x="71622" y="816889"/>
+                  </a:lnTo>
+                  <a:lnTo>
+                    <a:pt x="0" y="817557"/>
                   </a:lnTo>
                 </a:path>
               </a:pathLst>
@@ -4110,309 +4110,309 @@
           </p:nvSpPr>
           <p:spPr>
             <a:xfrm>
-              <a:off x="1172049" y="3657571"/>
-              <a:ext cx="7090630" cy="1717499"/>
+              <a:off x="1172049" y="3656347"/>
+              <a:ext cx="7090630" cy="1719418"/>
             </a:xfrm>
             <a:custGeom>
               <a:avLst/>
               <a:pathLst>
-                <a:path w="7090630" h="1717499">
+                <a:path w="7090630" h="1719418">
                   <a:moveTo>
-                    <a:pt x="0" y="1717499"/>
+                    <a:pt x="0" y="1719418"/>
                   </a:moveTo>
                   <a:lnTo>
-                    <a:pt x="71622" y="1713133"/>
-                  </a:lnTo>
-                  <a:lnTo>
-                    <a:pt x="143245" y="1708663"/>
-                  </a:lnTo>
-                  <a:lnTo>
-                    <a:pt x="214867" y="1704085"/>
-                  </a:lnTo>
-                  <a:lnTo>
-                    <a:pt x="286490" y="1699398"/>
-                  </a:lnTo>
-                  <a:lnTo>
-                    <a:pt x="358112" y="1694599"/>
-                  </a:lnTo>
-                  <a:lnTo>
-                    <a:pt x="429735" y="1689684"/>
-                  </a:lnTo>
-                  <a:lnTo>
-                    <a:pt x="501357" y="1684652"/>
-                  </a:lnTo>
-                  <a:lnTo>
-                    <a:pt x="572980" y="1679499"/>
-                  </a:lnTo>
-                  <a:lnTo>
-                    <a:pt x="644602" y="1674223"/>
-                  </a:lnTo>
-                  <a:lnTo>
-                    <a:pt x="716225" y="1668820"/>
-                  </a:lnTo>
-                  <a:lnTo>
-                    <a:pt x="787847" y="1663288"/>
-                  </a:lnTo>
-                  <a:lnTo>
-                    <a:pt x="859470" y="1657623"/>
-                  </a:lnTo>
-                  <a:lnTo>
-                    <a:pt x="931092" y="1651822"/>
-                  </a:lnTo>
-                  <a:lnTo>
-                    <a:pt x="1002715" y="1645883"/>
-                  </a:lnTo>
-                  <a:lnTo>
-                    <a:pt x="1074337" y="1639801"/>
-                  </a:lnTo>
-                  <a:lnTo>
-                    <a:pt x="1145960" y="1633573"/>
-                  </a:lnTo>
-                  <a:lnTo>
-                    <a:pt x="1217582" y="1627196"/>
-                  </a:lnTo>
-                  <a:lnTo>
-                    <a:pt x="1289205" y="1620666"/>
-                  </a:lnTo>
-                  <a:lnTo>
-                    <a:pt x="1360827" y="1613980"/>
-                  </a:lnTo>
-                  <a:lnTo>
-                    <a:pt x="1432450" y="1607134"/>
-                  </a:lnTo>
-                  <a:lnTo>
-                    <a:pt x="1504073" y="1600123"/>
-                  </a:lnTo>
-                  <a:lnTo>
-                    <a:pt x="1575695" y="1592945"/>
-                  </a:lnTo>
-                  <a:lnTo>
-                    <a:pt x="1647318" y="1585594"/>
-                  </a:lnTo>
-                  <a:lnTo>
-                    <a:pt x="1718940" y="1578067"/>
-                  </a:lnTo>
-                  <a:lnTo>
-                    <a:pt x="1790563" y="1570360"/>
-                  </a:lnTo>
-                  <a:lnTo>
-                    <a:pt x="1862185" y="1562468"/>
-                  </a:lnTo>
-                  <a:lnTo>
-                    <a:pt x="1933808" y="1554388"/>
-                  </a:lnTo>
-                  <a:lnTo>
-                    <a:pt x="2005430" y="1546113"/>
-                  </a:lnTo>
-                  <a:lnTo>
-                    <a:pt x="2077053" y="1537640"/>
-                  </a:lnTo>
-                  <a:lnTo>
-                    <a:pt x="2148675" y="1528964"/>
-                  </a:lnTo>
-                  <a:lnTo>
-                    <a:pt x="2220298" y="1520081"/>
-                  </a:lnTo>
-                  <a:lnTo>
-                    <a:pt x="2291920" y="1510984"/>
-                  </a:lnTo>
-                  <a:lnTo>
-                    <a:pt x="2363543" y="1501669"/>
-                  </a:lnTo>
-                  <a:lnTo>
-                    <a:pt x="2435165" y="1492131"/>
-                  </a:lnTo>
-                  <a:lnTo>
-                    <a:pt x="2506788" y="1482365"/>
-                  </a:lnTo>
-                  <a:lnTo>
-                    <a:pt x="2578410" y="1472365"/>
-                  </a:lnTo>
-                  <a:lnTo>
-                    <a:pt x="2650033" y="1462124"/>
-                  </a:lnTo>
-                  <a:lnTo>
-                    <a:pt x="2721655" y="1451639"/>
-                  </a:lnTo>
-                  <a:lnTo>
-                    <a:pt x="2793278" y="1440902"/>
-                  </a:lnTo>
-                  <a:lnTo>
-                    <a:pt x="2864901" y="1429908"/>
-                  </a:lnTo>
-                  <a:lnTo>
-                    <a:pt x="2936523" y="1418651"/>
-                  </a:lnTo>
-                  <a:lnTo>
-                    <a:pt x="3008146" y="1407123"/>
-                  </a:lnTo>
-                  <a:lnTo>
-                    <a:pt x="3079768" y="1395320"/>
-                  </a:lnTo>
-                  <a:lnTo>
-                    <a:pt x="3151391" y="1383233"/>
-                  </a:lnTo>
-                  <a:lnTo>
-                    <a:pt x="3223013" y="1370857"/>
-                  </a:lnTo>
-                  <a:lnTo>
-                    <a:pt x="3294636" y="1358185"/>
-                  </a:lnTo>
-                  <a:lnTo>
-                    <a:pt x="3366258" y="1345208"/>
-                  </a:lnTo>
-                  <a:lnTo>
-                    <a:pt x="3437881" y="1331921"/>
-                  </a:lnTo>
-                  <a:lnTo>
-                    <a:pt x="3509503" y="1318315"/>
-                  </a:lnTo>
-                  <a:lnTo>
-                    <a:pt x="3581126" y="1304384"/>
-                  </a:lnTo>
-                  <a:lnTo>
-                    <a:pt x="3652748" y="1290118"/>
-                  </a:lnTo>
-                  <a:lnTo>
-                    <a:pt x="3724371" y="1275511"/>
-                  </a:lnTo>
-                  <a:lnTo>
-                    <a:pt x="3795993" y="1260553"/>
-                  </a:lnTo>
-                  <a:lnTo>
-                    <a:pt x="3867616" y="1245237"/>
-                  </a:lnTo>
-                  <a:lnTo>
-                    <a:pt x="3939238" y="1229554"/>
-                  </a:lnTo>
-                  <a:lnTo>
-                    <a:pt x="4010861" y="1213495"/>
-                  </a:lnTo>
-                  <a:lnTo>
-                    <a:pt x="4082483" y="1197052"/>
-                  </a:lnTo>
-                  <a:lnTo>
-                    <a:pt x="4154106" y="1180214"/>
-                  </a:lnTo>
-                  <a:lnTo>
-                    <a:pt x="4225729" y="1162973"/>
-                  </a:lnTo>
-                  <a:lnTo>
-                    <a:pt x="4297351" y="1145318"/>
-                  </a:lnTo>
-                  <a:lnTo>
-                    <a:pt x="4368974" y="1127241"/>
-                  </a:lnTo>
-                  <a:lnTo>
-                    <a:pt x="4440596" y="1108730"/>
-                  </a:lnTo>
-                  <a:lnTo>
-                    <a:pt x="4512219" y="1089776"/>
-                  </a:lnTo>
-                  <a:lnTo>
-                    <a:pt x="4583841" y="1070368"/>
-                  </a:lnTo>
-                  <a:lnTo>
-                    <a:pt x="4655464" y="1050494"/>
-                  </a:lnTo>
-                  <a:lnTo>
-                    <a:pt x="4727086" y="1030144"/>
-                  </a:lnTo>
-                  <a:lnTo>
-                    <a:pt x="4798709" y="1009307"/>
-                  </a:lnTo>
-                  <a:lnTo>
-                    <a:pt x="4870331" y="987970"/>
-                  </a:lnTo>
-                  <a:lnTo>
-                    <a:pt x="4941954" y="966122"/>
-                  </a:lnTo>
-                  <a:lnTo>
-                    <a:pt x="5013576" y="943750"/>
-                  </a:lnTo>
-                  <a:lnTo>
-                    <a:pt x="5085199" y="920843"/>
-                  </a:lnTo>
-                  <a:lnTo>
-                    <a:pt x="5156821" y="897386"/>
-                  </a:lnTo>
-                  <a:lnTo>
-                    <a:pt x="5228444" y="873367"/>
-                  </a:lnTo>
-                  <a:lnTo>
-                    <a:pt x="5300066" y="848773"/>
-                  </a:lnTo>
-                  <a:lnTo>
-                    <a:pt x="5371689" y="823589"/>
-                  </a:lnTo>
-                  <a:lnTo>
-                    <a:pt x="5443311" y="797801"/>
-                  </a:lnTo>
-                  <a:lnTo>
-                    <a:pt x="5514934" y="771396"/>
-                  </a:lnTo>
-                  <a:lnTo>
-                    <a:pt x="5586557" y="744358"/>
-                  </a:lnTo>
-                  <a:lnTo>
-                    <a:pt x="5658179" y="716672"/>
-                  </a:lnTo>
-                  <a:lnTo>
-                    <a:pt x="5729802" y="688323"/>
-                  </a:lnTo>
-                  <a:lnTo>
-                    <a:pt x="5801424" y="659294"/>
-                  </a:lnTo>
-                  <a:lnTo>
-                    <a:pt x="5873047" y="629569"/>
-                  </a:lnTo>
-                  <a:lnTo>
-                    <a:pt x="5944669" y="599132"/>
-                  </a:lnTo>
-                  <a:lnTo>
-                    <a:pt x="6016292" y="567966"/>
-                  </a:lnTo>
-                  <a:lnTo>
-                    <a:pt x="6087914" y="536053"/>
-                  </a:lnTo>
-                  <a:lnTo>
-                    <a:pt x="6159537" y="503375"/>
-                  </a:lnTo>
-                  <a:lnTo>
-                    <a:pt x="6231159" y="469914"/>
-                  </a:lnTo>
-                  <a:lnTo>
-                    <a:pt x="6302782" y="435652"/>
-                  </a:lnTo>
-                  <a:lnTo>
-                    <a:pt x="6374404" y="400568"/>
-                  </a:lnTo>
-                  <a:lnTo>
-                    <a:pt x="6446027" y="364643"/>
-                  </a:lnTo>
-                  <a:lnTo>
-                    <a:pt x="6517649" y="327858"/>
-                  </a:lnTo>
-                  <a:lnTo>
-                    <a:pt x="6589272" y="290191"/>
-                  </a:lnTo>
-                  <a:lnTo>
-                    <a:pt x="6660894" y="251621"/>
-                  </a:lnTo>
-                  <a:lnTo>
-                    <a:pt x="6732517" y="212127"/>
-                  </a:lnTo>
-                  <a:lnTo>
-                    <a:pt x="6804139" y="171687"/>
-                  </a:lnTo>
-                  <a:lnTo>
-                    <a:pt x="6875762" y="130278"/>
-                  </a:lnTo>
-                  <a:lnTo>
-                    <a:pt x="6947385" y="87876"/>
-                  </a:lnTo>
-                  <a:lnTo>
-                    <a:pt x="7019007" y="44458"/>
+                    <a:pt x="71622" y="1715061"/>
+                  </a:lnTo>
+                  <a:lnTo>
+                    <a:pt x="143245" y="1710599"/>
+                  </a:lnTo>
+                  <a:lnTo>
+                    <a:pt x="214867" y="1706029"/>
+                  </a:lnTo>
+                  <a:lnTo>
+                    <a:pt x="286490" y="1701350"/>
+                  </a:lnTo>
+                  <a:lnTo>
+                    <a:pt x="358112" y="1696559"/>
+                  </a:lnTo>
+                  <a:lnTo>
+                    <a:pt x="429735" y="1691653"/>
+                  </a:lnTo>
+                  <a:lnTo>
+                    <a:pt x="501357" y="1686629"/>
+                  </a:lnTo>
+                  <a:lnTo>
+                    <a:pt x="572980" y="1681484"/>
+                  </a:lnTo>
+                  <a:lnTo>
+                    <a:pt x="644602" y="1676216"/>
+                  </a:lnTo>
+                  <a:lnTo>
+                    <a:pt x="716225" y="1670821"/>
+                  </a:lnTo>
+                  <a:lnTo>
+                    <a:pt x="787847" y="1665297"/>
+                  </a:lnTo>
+                  <a:lnTo>
+                    <a:pt x="859470" y="1659640"/>
+                  </a:lnTo>
+                  <a:lnTo>
+                    <a:pt x="931092" y="1653847"/>
+                  </a:lnTo>
+                  <a:lnTo>
+                    <a:pt x="1002715" y="1647915"/>
+                  </a:lnTo>
+                  <a:lnTo>
+                    <a:pt x="1074337" y="1641841"/>
+                  </a:lnTo>
+                  <a:lnTo>
+                    <a:pt x="1145960" y="1635621"/>
+                  </a:lnTo>
+                  <a:lnTo>
+                    <a:pt x="1217582" y="1629251"/>
+                  </a:lnTo>
+                  <a:lnTo>
+                    <a:pt x="1289205" y="1622729"/>
+                  </a:lnTo>
+                  <a:lnTo>
+                    <a:pt x="1360827" y="1616050"/>
+                  </a:lnTo>
+                  <a:lnTo>
+                    <a:pt x="1432450" y="1609211"/>
+                  </a:lnTo>
+                  <a:lnTo>
+                    <a:pt x="1504073" y="1602207"/>
+                  </a:lnTo>
+                  <a:lnTo>
+                    <a:pt x="1575695" y="1595036"/>
+                  </a:lnTo>
+                  <a:lnTo>
+                    <a:pt x="1647318" y="1587692"/>
+                  </a:lnTo>
+                  <a:lnTo>
+                    <a:pt x="1718940" y="1580171"/>
+                  </a:lnTo>
+                  <a:lnTo>
+                    <a:pt x="1790563" y="1572471"/>
+                  </a:lnTo>
+                  <a:lnTo>
+                    <a:pt x="1862185" y="1564585"/>
+                  </a:lnTo>
+                  <a:lnTo>
+                    <a:pt x="1933808" y="1556510"/>
+                  </a:lnTo>
+                  <a:lnTo>
+                    <a:pt x="2005430" y="1548241"/>
+                  </a:lnTo>
+                  <a:lnTo>
+                    <a:pt x="2077053" y="1539774"/>
+                  </a:lnTo>
+                  <a:lnTo>
+                    <a:pt x="2148675" y="1531103"/>
+                  </a:lnTo>
+                  <a:lnTo>
+                    <a:pt x="2220298" y="1522224"/>
+                  </a:lnTo>
+                  <a:lnTo>
+                    <a:pt x="2291920" y="1513132"/>
+                  </a:lnTo>
+                  <a:lnTo>
+                    <a:pt x="2363543" y="1503821"/>
+                  </a:lnTo>
+                  <a:lnTo>
+                    <a:pt x="2435165" y="1494287"/>
+                  </a:lnTo>
+                  <a:lnTo>
+                    <a:pt x="2506788" y="1484524"/>
+                  </a:lnTo>
+                  <a:lnTo>
+                    <a:pt x="2578410" y="1474527"/>
+                  </a:lnTo>
+                  <a:lnTo>
+                    <a:pt x="2650033" y="1464290"/>
+                  </a:lnTo>
+                  <a:lnTo>
+                    <a:pt x="2721655" y="1453807"/>
+                  </a:lnTo>
+                  <a:lnTo>
+                    <a:pt x="2793278" y="1443072"/>
+                  </a:lnTo>
+                  <a:lnTo>
+                    <a:pt x="2864901" y="1432079"/>
+                  </a:lnTo>
+                  <a:lnTo>
+                    <a:pt x="2936523" y="1420823"/>
+                  </a:lnTo>
+                  <a:lnTo>
+                    <a:pt x="3008146" y="1409296"/>
+                  </a:lnTo>
+                  <a:lnTo>
+                    <a:pt x="3079768" y="1397493"/>
+                  </a:lnTo>
+                  <a:lnTo>
+                    <a:pt x="3151391" y="1385406"/>
+                  </a:lnTo>
+                  <a:lnTo>
+                    <a:pt x="3223013" y="1373028"/>
+                  </a:lnTo>
+                  <a:lnTo>
+                    <a:pt x="3294636" y="1360354"/>
+                  </a:lnTo>
+                  <a:lnTo>
+                    <a:pt x="3366258" y="1347375"/>
+                  </a:lnTo>
+                  <a:lnTo>
+                    <a:pt x="3437881" y="1334085"/>
+                  </a:lnTo>
+                  <a:lnTo>
+                    <a:pt x="3509503" y="1320476"/>
+                  </a:lnTo>
+                  <a:lnTo>
+                    <a:pt x="3581126" y="1306540"/>
+                  </a:lnTo>
+                  <a:lnTo>
+                    <a:pt x="3652748" y="1292269"/>
+                  </a:lnTo>
+                  <a:lnTo>
+                    <a:pt x="3724371" y="1277656"/>
+                  </a:lnTo>
+                  <a:lnTo>
+                    <a:pt x="3795993" y="1262691"/>
+                  </a:lnTo>
+                  <a:lnTo>
+                    <a:pt x="3867616" y="1247368"/>
+                  </a:lnTo>
+                  <a:lnTo>
+                    <a:pt x="3939238" y="1231676"/>
+                  </a:lnTo>
+                  <a:lnTo>
+                    <a:pt x="4010861" y="1215608"/>
+                  </a:lnTo>
+                  <a:lnTo>
+                    <a:pt x="4082483" y="1199154"/>
+                  </a:lnTo>
+                  <a:lnTo>
+                    <a:pt x="4154106" y="1182305"/>
+                  </a:lnTo>
+                  <a:lnTo>
+                    <a:pt x="4225729" y="1165052"/>
+                  </a:lnTo>
+                  <a:lnTo>
+                    <a:pt x="4297351" y="1147384"/>
+                  </a:lnTo>
+                  <a:lnTo>
+                    <a:pt x="4368974" y="1129292"/>
+                  </a:lnTo>
+                  <a:lnTo>
+                    <a:pt x="4440596" y="1110765"/>
+                  </a:lnTo>
+                  <a:lnTo>
+                    <a:pt x="4512219" y="1091794"/>
+                  </a:lnTo>
+                  <a:lnTo>
+                    <a:pt x="4583841" y="1072367"/>
+                  </a:lnTo>
+                  <a:lnTo>
+                    <a:pt x="4655464" y="1052474"/>
+                  </a:lnTo>
+                  <a:lnTo>
+                    <a:pt x="4727086" y="1032103"/>
+                  </a:lnTo>
+                  <a:lnTo>
+                    <a:pt x="4798709" y="1011243"/>
+                  </a:lnTo>
+                  <a:lnTo>
+                    <a:pt x="4870331" y="989882"/>
+                  </a:lnTo>
+                  <a:lnTo>
+                    <a:pt x="4941954" y="968008"/>
+                  </a:lnTo>
+                  <a:lnTo>
+                    <a:pt x="5013576" y="945609"/>
+                  </a:lnTo>
+                  <a:lnTo>
+                    <a:pt x="5085199" y="922673"/>
+                  </a:lnTo>
+                  <a:lnTo>
+                    <a:pt x="5156821" y="899185"/>
+                  </a:lnTo>
+                  <a:lnTo>
+                    <a:pt x="5228444" y="875134"/>
+                  </a:lnTo>
+                  <a:lnTo>
+                    <a:pt x="5300066" y="850505"/>
+                  </a:lnTo>
+                  <a:lnTo>
+                    <a:pt x="5371689" y="825285"/>
+                  </a:lnTo>
+                  <a:lnTo>
+                    <a:pt x="5443311" y="799459"/>
+                  </a:lnTo>
+                  <a:lnTo>
+                    <a:pt x="5514934" y="773013"/>
+                  </a:lnTo>
+                  <a:lnTo>
+                    <a:pt x="5586557" y="745933"/>
+                  </a:lnTo>
+                  <a:lnTo>
+                    <a:pt x="5658179" y="718202"/>
+                  </a:lnTo>
+                  <a:lnTo>
+                    <a:pt x="5729802" y="689805"/>
+                  </a:lnTo>
+                  <a:lnTo>
+                    <a:pt x="5801424" y="660726"/>
+                  </a:lnTo>
+                  <a:lnTo>
+                    <a:pt x="5873047" y="630949"/>
+                  </a:lnTo>
+                  <a:lnTo>
+                    <a:pt x="5944669" y="600458"/>
+                  </a:lnTo>
+                  <a:lnTo>
+                    <a:pt x="6016292" y="569234"/>
+                  </a:lnTo>
+                  <a:lnTo>
+                    <a:pt x="6087914" y="537260"/>
+                  </a:lnTo>
+                  <a:lnTo>
+                    <a:pt x="6159537" y="504519"/>
+                  </a:lnTo>
+                  <a:lnTo>
+                    <a:pt x="6231159" y="470992"/>
+                  </a:lnTo>
+                  <a:lnTo>
+                    <a:pt x="6302782" y="436659"/>
+                  </a:lnTo>
+                  <a:lnTo>
+                    <a:pt x="6374404" y="401503"/>
+                  </a:lnTo>
+                  <a:lnTo>
+                    <a:pt x="6446027" y="365502"/>
+                  </a:lnTo>
+                  <a:lnTo>
+                    <a:pt x="6517649" y="328637"/>
+                  </a:lnTo>
+                  <a:lnTo>
+                    <a:pt x="6589272" y="290887"/>
+                  </a:lnTo>
+                  <a:lnTo>
+                    <a:pt x="6660894" y="252230"/>
+                  </a:lnTo>
+                  <a:lnTo>
+                    <a:pt x="6732517" y="212645"/>
+                  </a:lnTo>
+                  <a:lnTo>
+                    <a:pt x="6804139" y="172110"/>
+                  </a:lnTo>
+                  <a:lnTo>
+                    <a:pt x="6875762" y="130601"/>
+                  </a:lnTo>
+                  <a:lnTo>
+                    <a:pt x="6947385" y="88096"/>
+                  </a:lnTo>
+                  <a:lnTo>
+                    <a:pt x="7019007" y="44570"/>
                   </a:lnTo>
                   <a:lnTo>
                     <a:pt x="7090630" y="0"/>
@@ -4487,7 +4487,7 @@
           </p:nvSpPr>
           <p:spPr>
             <a:xfrm>
-              <a:off x="5756448" y="2073503"/>
+              <a:off x="5759271" y="2073503"/>
               <a:ext cx="0" cy="3649639"/>
             </a:xfrm>
             <a:custGeom>
@@ -4530,7 +4530,7 @@
           </p:nvSpPr>
           <p:spPr>
             <a:xfrm>
-              <a:off x="4469314" y="2073503"/>
+              <a:off x="4504692" y="2073503"/>
               <a:ext cx="0" cy="3649639"/>
             </a:xfrm>
             <a:custGeom>
@@ -4573,7 +4573,7 @@
           </p:nvSpPr>
           <p:spPr>
             <a:xfrm>
-              <a:off x="6872676" y="2073503"/>
+              <a:off x="6871070" y="2073503"/>
               <a:ext cx="0" cy="3649639"/>
             </a:xfrm>
             <a:custGeom>
@@ -4846,7 +4846,7 @@
           </p:nvSpPr>
           <p:spPr>
             <a:xfrm>
-              <a:off x="3199861" y="5785772"/>
+              <a:off x="3201825" y="5785772"/>
               <a:ext cx="161574" cy="80101"/>
             </a:xfrm>
             <a:prstGeom prst="rect">
@@ -4892,7 +4892,7 @@
           </p:nvSpPr>
           <p:spPr>
             <a:xfrm>
-              <a:off x="5730225" y="5785772"/>
+              <a:off x="5727471" y="5785772"/>
               <a:ext cx="62179" cy="80101"/>
             </a:xfrm>
             <a:prstGeom prst="rect">
@@ -4938,7 +4938,7 @@
           </p:nvSpPr>
           <p:spPr>
             <a:xfrm>
-              <a:off x="8179802" y="5785772"/>
+              <a:off x="8172329" y="5785772"/>
               <a:ext cx="124358" cy="80101"/>
             </a:xfrm>
             <a:prstGeom prst="rect">
@@ -5109,7 +5109,7 @@
                   <a:latin typeface="Helvetica"/>
                   <a:cs typeface="Helvetica"/>
                 </a:rPr>
-                <a:t>subHR per 10 mL/min decline: 0.72 (0.38-1.37), p_Bonf = 1.000 (n = 6)  |  per IQR decline (Δ = 24.2): 0.45 (0.09-2.15)  |  IQR: [-13.0, 11.2]</a:t>
+                <a:t>subHR per 10 mL/min decline: 0.72 (0.38-1.37), p_Bonf = 1.000 (n = 6)  |  per IQR decline (Δ = 23.9): 0.46 (0.10-2.13)  |  IQR: [-12.7, 11.2]</a:t>
               </a:r>
             </a:p>
           </p:txBody>
